--- a/result/AWS_AI_FDE.pptx
+++ b/result/AWS_AI_FDE.pptx
@@ -114,15 +114,6 @@
   <p:extLst>
     <p:ext uri="{521415D9-36F7-43E2-AB2F-B90AF26B5E84}">
       <p14:sectionLst xmlns:p14="http://schemas.microsoft.com/office/powerpoint/2010/main">
-        <p14:section name="가이드" id="{5B676074-C3C7-4E33-82A1-B8F989B76644}">
-          <p14:sldIdLst>
-            <p14:sldId id="269"/>
-            <p14:sldId id="272"/>
-            <p14:sldId id="286"/>
-            <p14:sldId id="287"/>
-            <p14:sldId id="301"/>
-          </p14:sldIdLst>
-        </p14:section>
         <p14:section name="표지" id="{65D52F42-0661-4B41-B441-9185E535CF94}">
           <p14:sldIdLst>
             <p14:sldId id="256"/>
@@ -156,33 +147,26 @@
             <p14:sldId id="275"/>
             <p14:sldId id="299"/>
             <p14:sldId id="300"/>
-          </p14:sldIdLst>
-        </p14:section>
-        <p14:section name="타임라인/흐름" id="{9D4BB107-11D1-4A44-9ACC-0B6CE7C3E5D2}">
-          <p14:sldIdLst>
+            <p14:sldId id="269"/>
+            <p14:sldId id="272"/>
+            <p14:sldId id="286"/>
+            <p14:sldId id="287"/>
+            <p14:sldId id="301"/>
+            <p14:sldId id="262"/>
+            <p14:sldId id="263"/>
+            <p14:sldId id="307"/>
+            <p14:sldId id="305"/>
+            <p14:sldId id="295"/>
+            <p14:sldId id="298"/>
+            <p14:sldId id="304"/>
+            <p14:sldId id="308"/>
+            <p14:sldId id="297"/>
             <p14:sldId id="260"/>
             <p14:sldId id="276"/>
             <p14:sldId id="302"/>
             <p14:sldId id="317"/>
             <p14:sldId id="309"/>
             <p14:sldId id="277"/>
-          </p14:sldIdLst>
-        </p14:section>
-        <p14:section name="변화" id="{4DCBC75A-F0A0-451D-8FC4-62F9A6C094AF}">
-          <p14:sldIdLst>
-            <p14:sldId id="295"/>
-            <p14:sldId id="298"/>
-            <p14:sldId id="304"/>
-            <p14:sldId id="308"/>
-            <p14:sldId id="297"/>
-          </p14:sldIdLst>
-        </p14:section>
-        <p14:section name="그래프/차트" id="{9658A8A5-B58E-4998-B187-951F90C296A1}">
-          <p14:sldIdLst>
-            <p14:sldId id="262"/>
-            <p14:sldId id="263"/>
-            <p14:sldId id="307"/>
-            <p14:sldId id="305"/>
           </p14:sldIdLst>
         </p14:section>
         <p14:section name="마무리" id="{62DC044E-9886-4F21-AC6A-E8799B9F72A4}">
@@ -5693,7 +5677,7 @@
                 <ns1:ea typeface="Pretendard SemiBold" panose="02000703000000020004" pitchFamily="2" charset="-127"/>
                 <ns1:cs typeface="Pretendard SemiBold" panose="02000703000000020004" pitchFamily="2" charset="-127"/>
               </ns1:rPr>
-              <ns1:t>Well-Architected 통과 = 고객 신뢰 …</ns1:t>
+              <ns1:t>Well-Architected 통과 = 고객 신뢰</ns1:t>
             </ns1:r>
             <ns1:endParaRPr lang="en-US" altLang="ko-KR" sz="1400" dirty="0">
               <ns1:solidFill>
@@ -7527,1687 +7511,1861 @@
 </file>
 
 <file path=ppt/slides/slide31.xml><?xml version="1.0" encoding="utf-8"?>
-<p:sld xmlns:a="http://schemas.openxmlformats.org/drawingml/2006/main" xmlns:p="http://schemas.openxmlformats.org/presentationml/2006/main" xmlns:p14="http://schemas.microsoft.com/office/powerpoint/2010/main">
-  <p:cSld>
-    <p:spTree>
-      <p:nvGrpSpPr>
-        <p:cNvPr id="1" name=""/>
-        <p:cNvGrpSpPr/>
-        <p:nvPr/>
-      </p:nvGrpSpPr>
-      <p:grpSpPr>
-        <a:xfrm>
-          <a:off x="0" y="0"/>
-          <a:ext cx="0" cy="0"/>
-          <a:chOff x="0" y="0"/>
-          <a:chExt cx="0" cy="0"/>
-        </a:xfrm>
-      </p:grpSpPr>
-      <p:sp>
-        <p:nvSpPr>
-          <p:cNvPr id="13" name="직사각형 12"/>
-          <p:cNvSpPr/>
-          <p:nvPr/>
-        </p:nvSpPr>
-        <p:spPr>
-          <a:xfrm>
-            <a:off x="4897938" y="838200"/>
-            <a:ext cx="2495782" cy="6020378"/>
-          </a:xfrm>
-          <a:prstGeom prst="rect">
-            <a:avLst/>
-          </a:prstGeom>
-          <a:solidFill>
-            <a:schemeClr val="bg1">
-              <a:lumMod val="85000"/>
-              <a:alpha val="64000"/>
-            </a:schemeClr>
-          </a:solidFill>
-          <a:ln>
-            <a:noFill/>
-          </a:ln>
-        </p:spPr>
-        <p:style>
-          <a:lnRef idx="2">
-            <a:schemeClr val="accent1">
-              <a:shade val="50000"/>
-            </a:schemeClr>
-          </a:lnRef>
-          <a:fillRef idx="1">
-            <a:schemeClr val="accent1"/>
-          </a:fillRef>
-          <a:effectRef idx="0">
-            <a:schemeClr val="accent1"/>
-          </a:effectRef>
-          <a:fontRef idx="minor">
-            <a:schemeClr val="lt1"/>
-          </a:fontRef>
-        </p:style>
-        <p:txBody>
-          <a:bodyPr rtlCol="0" anchor="ctr"/>
-          <a:lstStyle/>
-          <a:p>
-            <a:pPr algn="ctr"/>
-            <a:endParaRPr lang="ko-KR" altLang="en-US" dirty="0"/>
-          </a:p>
-        </p:txBody>
-      </p:sp>
-      <p:sp>
-        <p:nvSpPr>
-          <p:cNvPr id="15" name="직사각형 14"/>
-          <p:cNvSpPr/>
-          <p:nvPr/>
-        </p:nvSpPr>
-        <p:spPr>
-          <a:xfrm>
-            <a:off x="9696217" y="838200"/>
-            <a:ext cx="2495782" cy="6020378"/>
-          </a:xfrm>
-          <a:prstGeom prst="rect">
-            <a:avLst/>
-          </a:prstGeom>
-          <a:solidFill>
-            <a:schemeClr val="bg1">
-              <a:lumMod val="85000"/>
-              <a:alpha val="64000"/>
-            </a:schemeClr>
-          </a:solidFill>
-          <a:ln>
-            <a:noFill/>
-          </a:ln>
-        </p:spPr>
-        <p:style>
-          <a:lnRef idx="2">
-            <a:schemeClr val="accent1">
-              <a:shade val="50000"/>
-            </a:schemeClr>
-          </a:lnRef>
-          <a:fillRef idx="1">
-            <a:schemeClr val="accent1"/>
-          </a:fillRef>
-          <a:effectRef idx="0">
-            <a:schemeClr val="accent1"/>
-          </a:effectRef>
-          <a:fontRef idx="minor">
-            <a:schemeClr val="lt1"/>
-          </a:fontRef>
-        </p:style>
-        <p:txBody>
-          <a:bodyPr rtlCol="0" anchor="ctr"/>
-          <a:lstStyle/>
-          <a:p>
-            <a:pPr algn="ctr"/>
-            <a:endParaRPr lang="ko-KR" altLang="en-US" dirty="0"/>
-          </a:p>
-        </p:txBody>
-      </p:sp>
-      <p:sp>
-        <p:nvSpPr>
-          <p:cNvPr id="8" name="제목 7"/>
-          <p:cNvSpPr>
-            <a:spLocks noGrp="1"/>
-          </p:cNvSpPr>
-          <p:nvPr>
-            <p:ph type="title"/>
-          </p:nvPr>
-        </p:nvSpPr>
-        <p:spPr/>
-        <p:txBody>
-          <a:bodyPr>
-            <a:normAutofit/>
-          </a:bodyPr>
-          <a:lstStyle/>
-          <a:p>
-            <a:r>
-              <a:rPr lang="ko-KR" altLang="ko-KR" dirty="0" smtClean="0"/>
-              <a:t>고객 세일즈 사이클과 FDE 개입 전략</a:t>
-            </a:r>
-            <a:endParaRPr lang="ko-KR" altLang="en-US" dirty="0"/>
-          </a:p>
-        </p:txBody>
-      </p:sp>
-      <p:sp>
-        <p:nvSpPr>
-          <p:cNvPr id="9" name="내용 개체 틀 8"/>
-          <p:cNvSpPr>
-            <a:spLocks noGrp="1"/>
-          </p:cNvSpPr>
-          <p:nvPr>
-            <p:ph sz="quarter" idx="10"/>
-          </p:nvPr>
-        </p:nvSpPr>
-        <p:spPr/>
-        <p:txBody>
-          <a:bodyPr/>
-          <a:lstStyle/>
-          <a:p>
-            <a:r>
-              <a:rPr lang="ko-KR" altLang="ko-KR" dirty="0" smtClean="0"/>
-              <a:t>03 세일즈 사이클 단계별 FDE 역할</a:t>
-            </a:r>
-            <a:endParaRPr lang="ko-KR" altLang="en-US" dirty="0"/>
-          </a:p>
-        </p:txBody>
-      </p:sp>
-      <p:sp>
-        <p:nvSpPr>
-          <p:cNvPr id="17" name="Text 1"/>
-          <p:cNvSpPr/>
-          <p:nvPr/>
-        </p:nvSpPr>
-        <p:spPr>
-          <a:xfrm>
-            <a:off x="395032" y="780494"/>
-            <a:ext cx="2200409" cy="1196321"/>
-          </a:xfrm>
-          <a:prstGeom prst="rect">
-            <a:avLst/>
-          </a:prstGeom>
-          <a:noFill/>
-          <a:ln/>
-        </p:spPr>
-        <p:txBody>
-          <a:bodyPr wrap="square" lIns="0" tIns="0" rIns="0" bIns="0" rtlCol="0" anchor="t"/>
-          <a:lstStyle/>
-          <a:p>
-            <a:r>
-              <a:rPr lang="ko-KR" altLang="ko-KR" dirty="0" smtClean="0">
-                <a:solidFill>
-                  <a:schemeClr val="tx1">
-                    <a:lumMod val="85000"/>
-                    <a:lumOff val="15000"/>
-                  </a:schemeClr>
-                </a:solidFill>
-                <a:latin typeface="Pretendard SemiBold" panose="02000703000000020004" pitchFamily="2" charset="-127"/>
-                <a:ea typeface="Pretendard SemiBold" panose="02000703000000020004" pitchFamily="2" charset="-127"/>
-                <a:cs typeface="Pretendard SemiBold" panose="02000703000000020004" pitchFamily="2" charset="-127"/>
-              </a:rPr>
-              <a:t>3. FDE 세일즈 개입 4단계 프로세스</a:t>
-            </a:r>
-          </a:p>
-          <a:p>
-            <a:r>
-              <a:rPr lang="ko-KR" altLang="en-US" dirty="0" smtClean="0">
-                <a:solidFill>
-                  <a:schemeClr val="tx1">
-                    <a:lumMod val="85000"/>
-                    <a:lumOff val="15000"/>
-                  </a:schemeClr>
-                </a:solidFill>
-                <a:latin typeface="Pretendard SemiBold" panose="02000703000000020004" pitchFamily="2" charset="-127"/>
-                <a:ea typeface="Pretendard SemiBold" panose="02000703000000020004" pitchFamily="2" charset="-127"/>
-                <a:cs typeface="Pretendard SemiBold" panose="02000703000000020004" pitchFamily="2" charset="-127"/>
-              </a:rPr>
-              <a:t/>
-            </a:r>
-            <a:endParaRPr lang="en-US" altLang="ko-KR" dirty="0" smtClean="0">
-              <a:solidFill>
-                <a:schemeClr val="tx1">
-                  <a:lumMod val="85000"/>
-                  <a:lumOff val="15000"/>
-                </a:schemeClr>
-              </a:solidFill>
-              <a:latin typeface="Pretendard SemiBold" panose="02000703000000020004" pitchFamily="2" charset="-127"/>
-              <a:ea typeface="Pretendard SemiBold" panose="02000703000000020004" pitchFamily="2" charset="-127"/>
-              <a:cs typeface="Pretendard SemiBold" panose="02000703000000020004" pitchFamily="2" charset="-127"/>
-            </a:endParaRPr>
-          </a:p>
-          <a:p>
-            <a:r>
-              <a:rPr lang="ko-KR" altLang="en-US" dirty="0" smtClean="0">
-                <a:solidFill>
-                  <a:schemeClr val="tx1">
-                    <a:lumMod val="85000"/>
-                    <a:lumOff val="15000"/>
-                  </a:schemeClr>
-                </a:solidFill>
-                <a:latin typeface="Pretendard SemiBold" panose="02000703000000020004" pitchFamily="2" charset="-127"/>
-                <a:ea typeface="Pretendard SemiBold" panose="02000703000000020004" pitchFamily="2" charset="-127"/>
-                <a:cs typeface="Pretendard SemiBold" panose="02000703000000020004" pitchFamily="2" charset="-127"/>
-              </a:rPr>
-              <a:t/>
-            </a:r>
-            <a:r>
-              <a:rPr lang="en-US" altLang="ko-KR" dirty="0" smtClean="0">
-                <a:solidFill>
-                  <a:schemeClr val="tx1">
-                    <a:lumMod val="85000"/>
-                    <a:lumOff val="15000"/>
-                  </a:schemeClr>
-                </a:solidFill>
-                <a:latin typeface="Pretendard SemiBold" panose="02000703000000020004" pitchFamily="2" charset="-127"/>
-                <a:ea typeface="Pretendard SemiBold" panose="02000703000000020004" pitchFamily="2" charset="-127"/>
-                <a:cs typeface="Pretendard SemiBold" panose="02000703000000020004" pitchFamily="2" charset="-127"/>
-              </a:rPr>
-              <a:t/>
-            </a:r>
-            <a:r>
-              <a:rPr lang="ko-KR" altLang="en-US" dirty="0" smtClean="0">
-                <a:solidFill>
-                  <a:schemeClr val="tx1">
-                    <a:lumMod val="85000"/>
-                    <a:lumOff val="15000"/>
-                  </a:schemeClr>
-                </a:solidFill>
-                <a:latin typeface="Pretendard SemiBold" panose="02000703000000020004" pitchFamily="2" charset="-127"/>
-                <a:ea typeface="Pretendard SemiBold" panose="02000703000000020004" pitchFamily="2" charset="-127"/>
-                <a:cs typeface="Pretendard SemiBold" panose="02000703000000020004" pitchFamily="2" charset="-127"/>
-              </a:rPr>
-              <a:t/>
-            </a:r>
-            <a:r>
-              <a:rPr lang="en-US" altLang="ko-KR" dirty="0" smtClean="0">
-                <a:solidFill>
-                  <a:schemeClr val="tx1">
-                    <a:lumMod val="85000"/>
-                    <a:lumOff val="15000"/>
-                  </a:schemeClr>
-                </a:solidFill>
-                <a:latin typeface="Pretendard SemiBold" panose="02000703000000020004" pitchFamily="2" charset="-127"/>
-                <a:ea typeface="Pretendard SemiBold" panose="02000703000000020004" pitchFamily="2" charset="-127"/>
-                <a:cs typeface="Pretendard SemiBold" panose="02000703000000020004" pitchFamily="2" charset="-127"/>
-              </a:rPr>
-              <a:t/>
-            </a:r>
-            <a:r>
-              <a:rPr lang="ko-KR" altLang="en-US" dirty="0" smtClean="0">
-                <a:solidFill>
-                  <a:schemeClr val="tx1">
-                    <a:lumMod val="85000"/>
-                    <a:lumOff val="15000"/>
-                  </a:schemeClr>
-                </a:solidFill>
-                <a:latin typeface="Pretendard SemiBold" panose="02000703000000020004" pitchFamily="2" charset="-127"/>
-                <a:ea typeface="Pretendard SemiBold" panose="02000703000000020004" pitchFamily="2" charset="-127"/>
-                <a:cs typeface="Pretendard SemiBold" panose="02000703000000020004" pitchFamily="2" charset="-127"/>
-              </a:rPr>
-              <a:t/>
-            </a:r>
-            <a:endParaRPr lang="en-US" altLang="ko-KR" dirty="0" smtClean="0">
-              <a:solidFill>
-                <a:schemeClr val="tx1">
-                  <a:lumMod val="85000"/>
-                  <a:lumOff val="15000"/>
-                </a:schemeClr>
-              </a:solidFill>
-              <a:latin typeface="Pretendard SemiBold" panose="02000703000000020004" pitchFamily="2" charset="-127"/>
-              <a:ea typeface="Pretendard SemiBold" panose="02000703000000020004" pitchFamily="2" charset="-127"/>
-              <a:cs typeface="Pretendard SemiBold" panose="02000703000000020004" pitchFamily="2" charset="-127"/>
-            </a:endParaRPr>
-          </a:p>
-          <a:p>
-            <a:r>
-              <a:rPr lang="ko-KR" altLang="en-US" dirty="0" smtClean="0">
-                <a:solidFill>
-                  <a:schemeClr val="tx1">
-                    <a:lumMod val="85000"/>
-                    <a:lumOff val="15000"/>
-                  </a:schemeClr>
-                </a:solidFill>
-                <a:latin typeface="Pretendard SemiBold" panose="02000703000000020004" pitchFamily="2" charset="-127"/>
-                <a:ea typeface="Pretendard SemiBold" panose="02000703000000020004" pitchFamily="2" charset="-127"/>
-                <a:cs typeface="Pretendard SemiBold" panose="02000703000000020004" pitchFamily="2" charset="-127"/>
-              </a:rPr>
-              <a:t/>
-            </a:r>
-            <a:endParaRPr lang="en-US" altLang="ko-KR" dirty="0">
-              <a:solidFill>
-                <a:schemeClr val="tx1">
-                  <a:lumMod val="85000"/>
-                  <a:lumOff val="15000"/>
-                </a:schemeClr>
-              </a:solidFill>
-              <a:latin typeface="Pretendard SemiBold" panose="02000703000000020004" pitchFamily="2" charset="-127"/>
-              <a:ea typeface="Pretendard SemiBold" panose="02000703000000020004" pitchFamily="2" charset="-127"/>
-              <a:cs typeface="Pretendard SemiBold" panose="02000703000000020004" pitchFamily="2" charset="-127"/>
-            </a:endParaRPr>
-          </a:p>
-        </p:txBody>
-      </p:sp>
-      <p:sp>
-        <p:nvSpPr>
-          <p:cNvPr id="18" name="Text 1"/>
-          <p:cNvSpPr/>
-          <p:nvPr/>
-        </p:nvSpPr>
-        <p:spPr>
-          <a:xfrm>
-            <a:off x="395032" y="2311627"/>
-            <a:ext cx="2200409" cy="923063"/>
-          </a:xfrm>
-          <a:prstGeom prst="rect">
-            <a:avLst/>
-          </a:prstGeom>
-          <a:noFill/>
-          <a:ln/>
-        </p:spPr>
-        <p:txBody>
-          <a:bodyPr wrap="square" lIns="0" tIns="0" rIns="0" bIns="0" rtlCol="0" anchor="t"/>
-          <a:lstStyle/>
-          <a:p>
-            <a:r>
-              <a:rPr lang="ko-KR" altLang="en-US" sz="1200" dirty="0" smtClean="0">
-                <a:solidFill>
-                  <a:schemeClr val="tx1">
-                    <a:lumMod val="75000"/>
-                    <a:lumOff val="25000"/>
-                  </a:schemeClr>
-                </a:solidFill>
-                <a:latin typeface="Pretendard" panose="02000503000000020004" pitchFamily="2" charset="-127"/>
-                <a:ea typeface="Pretendard" panose="02000503000000020004" pitchFamily="2" charset="-127"/>
-                <a:cs typeface="Pretendard" panose="02000503000000020004" pitchFamily="2" charset="-127"/>
-              </a:rPr>
-              <a:t>고객 세일즈 사이클 전 단계에서 FDE가 기술 신뢰를 구축하고 딜 클로징을 가속하는 단계별 전략입니다.</a:t>
-            </a:r>
-            <a:endParaRPr lang="en-US" sz="1200" dirty="0">
-              <a:solidFill>
-                <a:schemeClr val="tx1">
-                  <a:lumMod val="75000"/>
-                  <a:lumOff val="25000"/>
-                </a:schemeClr>
-              </a:solidFill>
-              <a:latin typeface="Pretendard" panose="02000503000000020004" pitchFamily="2" charset="-127"/>
-              <a:ea typeface="Pretendard" panose="02000503000000020004" pitchFamily="2" charset="-127"/>
-              <a:cs typeface="Pretendard" panose="02000503000000020004" pitchFamily="2" charset="-127"/>
-            </a:endParaRPr>
-          </a:p>
-        </p:txBody>
-      </p:sp>
-      <p:sp>
-        <p:nvSpPr>
-          <p:cNvPr id="19" name="직사각형 18"/>
-          <p:cNvSpPr/>
-          <p:nvPr/>
-        </p:nvSpPr>
-        <p:spPr>
-          <a:xfrm>
-            <a:off x="2657592" y="780495"/>
-            <a:ext cx="9534407" cy="57705"/>
-          </a:xfrm>
-          <a:prstGeom prst="rect">
-            <a:avLst/>
-          </a:prstGeom>
-          <a:gradFill>
-            <a:gsLst>
-              <a:gs pos="0">
-                <a:srgbClr val="E6E7FF"/>
-              </a:gs>
-              <a:gs pos="77000">
-                <a:srgbClr val="1419AB"/>
-              </a:gs>
-            </a:gsLst>
-            <a:lin ang="2700000" scaled="0"/>
-          </a:gradFill>
-          <a:ln>
-            <a:noFill/>
-          </a:ln>
-        </p:spPr>
-        <p:style>
-          <a:lnRef idx="2">
-            <a:schemeClr val="accent1">
-              <a:shade val="50000"/>
-            </a:schemeClr>
-          </a:lnRef>
-          <a:fillRef idx="1">
-            <a:schemeClr val="accent1"/>
-          </a:fillRef>
-          <a:effectRef idx="0">
-            <a:schemeClr val="accent1"/>
-          </a:effectRef>
-          <a:fontRef idx="minor">
-            <a:schemeClr val="lt1"/>
-          </a:fontRef>
-        </p:style>
-        <p:txBody>
-          <a:bodyPr rtlCol="0" anchor="ctr"/>
-          <a:lstStyle/>
-          <a:p>
-            <a:pPr algn="ctr"/>
-            <a:endParaRPr lang="en-US" altLang="ko-KR" sz="1200" dirty="0">
-              <a:latin typeface="Pretendard SemiBold" panose="02000703000000020004" pitchFamily="2" charset="-127"/>
-              <a:ea typeface="Pretendard SemiBold" panose="02000703000000020004" pitchFamily="2" charset="-127"/>
-              <a:cs typeface="Pretendard SemiBold" panose="02000703000000020004" pitchFamily="2" charset="-127"/>
-            </a:endParaRPr>
-          </a:p>
-        </p:txBody>
-      </p:sp>
-      <p:sp>
-        <p:nvSpPr>
-          <p:cNvPr id="14" name="이등변 삼각형 13"/>
-          <p:cNvSpPr/>
-          <p:nvPr/>
-        </p:nvSpPr>
-        <p:spPr>
-          <a:xfrm rot="5400000">
-            <a:off x="4823242" y="3588121"/>
-            <a:ext cx="334964" cy="185573"/>
-          </a:xfrm>
-          <a:prstGeom prst="triangle">
-            <a:avLst>
-              <a:gd name="adj" fmla="val 49288"/>
-            </a:avLst>
-          </a:prstGeom>
-          <a:solidFill>
-            <a:srgbClr val="F2F2F2"/>
-          </a:solidFill>
-          <a:ln>
-            <a:noFill/>
-          </a:ln>
-        </p:spPr>
-        <p:style>
-          <a:lnRef idx="2">
-            <a:schemeClr val="accent1">
-              <a:shade val="50000"/>
-            </a:schemeClr>
-          </a:lnRef>
-          <a:fillRef idx="1">
-            <a:schemeClr val="accent1"/>
-          </a:fillRef>
-          <a:effectRef idx="0">
-            <a:schemeClr val="accent1"/>
-          </a:effectRef>
-          <a:fontRef idx="minor">
-            <a:schemeClr val="lt1"/>
-          </a:fontRef>
-        </p:style>
-        <p:txBody>
-          <a:bodyPr rtlCol="0" anchor="ctr"/>
-          <a:lstStyle/>
-          <a:p>
-            <a:pPr algn="ctr"/>
-            <a:endParaRPr lang="ko-KR" altLang="en-US"/>
-          </a:p>
-        </p:txBody>
-      </p:sp>
-      <p:sp>
-        <p:nvSpPr>
-          <p:cNvPr id="16" name="이등변 삼각형 15"/>
-          <p:cNvSpPr/>
-          <p:nvPr/>
-        </p:nvSpPr>
-        <p:spPr>
-          <a:xfrm rot="5400000">
-            <a:off x="7311312" y="3588121"/>
-            <a:ext cx="334964" cy="185573"/>
-          </a:xfrm>
-          <a:prstGeom prst="triangle">
-            <a:avLst>
-              <a:gd name="adj" fmla="val 49288"/>
-            </a:avLst>
-          </a:prstGeom>
-          <a:solidFill>
-            <a:srgbClr val="E2E2E2"/>
-          </a:solidFill>
-          <a:ln>
-            <a:noFill/>
-          </a:ln>
-        </p:spPr>
-        <p:style>
-          <a:lnRef idx="2">
-            <a:schemeClr val="accent1">
-              <a:shade val="50000"/>
-            </a:schemeClr>
-          </a:lnRef>
-          <a:fillRef idx="1">
-            <a:schemeClr val="accent1"/>
-          </a:fillRef>
-          <a:effectRef idx="0">
-            <a:schemeClr val="accent1"/>
-          </a:effectRef>
-          <a:fontRef idx="minor">
-            <a:schemeClr val="lt1"/>
-          </a:fontRef>
-        </p:style>
-        <p:txBody>
-          <a:bodyPr rtlCol="0" anchor="ctr"/>
-          <a:lstStyle/>
-          <a:p>
-            <a:pPr algn="ctr"/>
-            <a:endParaRPr lang="ko-KR" altLang="en-US"/>
-          </a:p>
-        </p:txBody>
-      </p:sp>
-      <p:sp>
-        <p:nvSpPr>
-          <p:cNvPr id="22" name="이등변 삼각형 21"/>
-          <p:cNvSpPr/>
-          <p:nvPr/>
-        </p:nvSpPr>
-        <p:spPr>
-          <a:xfrm rot="5400000">
-            <a:off x="9621521" y="3588121"/>
-            <a:ext cx="334964" cy="185573"/>
-          </a:xfrm>
-          <a:prstGeom prst="triangle">
-            <a:avLst>
-              <a:gd name="adj" fmla="val 49288"/>
-            </a:avLst>
-          </a:prstGeom>
-          <a:solidFill>
-            <a:srgbClr val="F2F2F2"/>
-          </a:solidFill>
-          <a:ln>
-            <a:noFill/>
-          </a:ln>
-        </p:spPr>
-        <p:style>
-          <a:lnRef idx="2">
-            <a:schemeClr val="accent1">
-              <a:shade val="50000"/>
-            </a:schemeClr>
-          </a:lnRef>
-          <a:fillRef idx="1">
-            <a:schemeClr val="accent1"/>
-          </a:fillRef>
-          <a:effectRef idx="0">
-            <a:schemeClr val="accent1"/>
-          </a:effectRef>
-          <a:fontRef idx="minor">
-            <a:schemeClr val="lt1"/>
-          </a:fontRef>
-        </p:style>
-        <p:txBody>
-          <a:bodyPr rtlCol="0" anchor="ctr"/>
-          <a:lstStyle/>
-          <a:p>
-            <a:pPr algn="ctr"/>
-            <a:endParaRPr lang="ko-KR" altLang="en-US"/>
-          </a:p>
-        </p:txBody>
-      </p:sp>
-      <p:sp>
-        <p:nvSpPr>
-          <p:cNvPr id="23" name="직사각형 22"/>
-          <p:cNvSpPr/>
-          <p:nvPr/>
-        </p:nvSpPr>
-        <p:spPr>
-          <a:xfrm>
-            <a:off x="4263276" y="895905"/>
-            <a:ext cx="634662" cy="338554"/>
-          </a:xfrm>
-          <a:prstGeom prst="rect">
-            <a:avLst/>
-          </a:prstGeom>
-        </p:spPr>
-        <p:txBody>
-          <a:bodyPr wrap="square">
-            <a:spAutoFit/>
-          </a:bodyPr>
-          <a:lstStyle/>
-          <a:p>
-            <a:pPr algn="r"/>
-            <a:r>
-              <a:rPr lang="ko-KR" altLang="ko-KR" sz="1600" dirty="0" smtClean="0">
-                <a:solidFill>
-                  <a:srgbClr val="B0B2E9"/>
-                </a:solidFill>
-                <a:latin typeface="Pretendard SemiBold" panose="02000703000000020004" pitchFamily="2" charset="-127"/>
-                <a:ea typeface="Pretendard SemiBold" panose="02000703000000020004" pitchFamily="2" charset="-127"/>
-                <a:cs typeface="Pretendard SemiBold" panose="02000703000000020004" pitchFamily="2" charset="-127"/>
-              </a:rPr>
-              <a:t>1단계</a:t>
-            </a:r>
-            <a:endParaRPr lang="en-US" altLang="ko-KR" sz="1600" dirty="0">
-              <a:solidFill>
-                <a:srgbClr val="B0B2E9"/>
-              </a:solidFill>
-              <a:latin typeface="Pretendard SemiBold" panose="02000703000000020004" pitchFamily="2" charset="-127"/>
-              <a:ea typeface="Pretendard SemiBold" panose="02000703000000020004" pitchFamily="2" charset="-127"/>
-              <a:cs typeface="Pretendard SemiBold" panose="02000703000000020004" pitchFamily="2" charset="-127"/>
-            </a:endParaRPr>
-          </a:p>
-        </p:txBody>
-      </p:sp>
-      <p:sp>
-        <p:nvSpPr>
-          <p:cNvPr id="24" name="직사각형 23"/>
-          <p:cNvSpPr/>
-          <p:nvPr/>
-        </p:nvSpPr>
-        <p:spPr>
-          <a:xfrm>
-            <a:off x="6751345" y="895905"/>
-            <a:ext cx="634662" cy="338554"/>
-          </a:xfrm>
-          <a:prstGeom prst="rect">
-            <a:avLst/>
-          </a:prstGeom>
-        </p:spPr>
-        <p:txBody>
-          <a:bodyPr wrap="square">
-            <a:spAutoFit/>
-          </a:bodyPr>
-          <a:lstStyle/>
-          <a:p>
-            <a:pPr algn="r"/>
-            <a:r>
-              <a:rPr lang="ko-KR" altLang="ko-KR" sz="1600" dirty="0" smtClean="0">
-                <a:solidFill>
-                  <a:srgbClr val="7377D1"/>
-                </a:solidFill>
-                <a:latin typeface="Pretendard SemiBold" panose="02000703000000020004" pitchFamily="2" charset="-127"/>
-                <a:ea typeface="Pretendard SemiBold" panose="02000703000000020004" pitchFamily="2" charset="-127"/>
-                <a:cs typeface="Pretendard SemiBold" panose="02000703000000020004" pitchFamily="2" charset="-127"/>
-              </a:rPr>
-              <a:t>2단계</a:t>
-            </a:r>
-            <a:endParaRPr lang="en-US" altLang="ko-KR" sz="1600" dirty="0">
-              <a:solidFill>
-                <a:srgbClr val="7377D1"/>
-              </a:solidFill>
-              <a:latin typeface="Pretendard SemiBold" panose="02000703000000020004" pitchFamily="2" charset="-127"/>
-              <a:ea typeface="Pretendard SemiBold" panose="02000703000000020004" pitchFamily="2" charset="-127"/>
-              <a:cs typeface="Pretendard SemiBold" panose="02000703000000020004" pitchFamily="2" charset="-127"/>
-            </a:endParaRPr>
-          </a:p>
-        </p:txBody>
-      </p:sp>
-      <p:sp>
-        <p:nvSpPr>
-          <p:cNvPr id="27" name="직사각형 26"/>
-          <p:cNvSpPr/>
-          <p:nvPr/>
-        </p:nvSpPr>
-        <p:spPr>
-          <a:xfrm>
-            <a:off x="9051374" y="895905"/>
-            <a:ext cx="634662" cy="338554"/>
-          </a:xfrm>
-          <a:prstGeom prst="rect">
-            <a:avLst/>
-          </a:prstGeom>
-        </p:spPr>
-        <p:txBody>
-          <a:bodyPr wrap="square">
-            <a:spAutoFit/>
-          </a:bodyPr>
-          <a:lstStyle/>
-          <a:p>
-            <a:pPr algn="r"/>
-            <a:r>
-              <a:rPr lang="ko-KR" altLang="ko-KR" sz="1600" dirty="0" smtClean="0">
-                <a:solidFill>
-                  <a:srgbClr val="363AB9"/>
-                </a:solidFill>
-                <a:latin typeface="Pretendard SemiBold" panose="02000703000000020004" pitchFamily="2" charset="-127"/>
-                <a:ea typeface="Pretendard SemiBold" panose="02000703000000020004" pitchFamily="2" charset="-127"/>
-                <a:cs typeface="Pretendard SemiBold" panose="02000703000000020004" pitchFamily="2" charset="-127"/>
-              </a:rPr>
-              <a:t>3단계</a:t>
-            </a:r>
-            <a:endParaRPr lang="en-US" altLang="ko-KR" sz="1600" dirty="0">
-              <a:solidFill>
-                <a:srgbClr val="363AB9"/>
-              </a:solidFill>
-              <a:latin typeface="Pretendard SemiBold" panose="02000703000000020004" pitchFamily="2" charset="-127"/>
-              <a:ea typeface="Pretendard SemiBold" panose="02000703000000020004" pitchFamily="2" charset="-127"/>
-              <a:cs typeface="Pretendard SemiBold" panose="02000703000000020004" pitchFamily="2" charset="-127"/>
-            </a:endParaRPr>
-          </a:p>
-        </p:txBody>
-      </p:sp>
-      <p:sp>
-        <p:nvSpPr>
-          <p:cNvPr id="28" name="직사각형 27"/>
-          <p:cNvSpPr/>
-          <p:nvPr/>
-        </p:nvSpPr>
-        <p:spPr>
-          <a:xfrm>
-            <a:off x="11493341" y="895905"/>
-            <a:ext cx="634662" cy="338554"/>
-          </a:xfrm>
-          <a:prstGeom prst="rect">
-            <a:avLst/>
-          </a:prstGeom>
-        </p:spPr>
-        <p:txBody>
-          <a:bodyPr wrap="square">
-            <a:spAutoFit/>
-          </a:bodyPr>
-          <a:lstStyle/>
-          <a:p>
-            <a:pPr algn="r"/>
-            <a:r>
-              <a:rPr lang="ko-KR" altLang="ko-KR" sz="1600" dirty="0" smtClean="0">
-                <a:solidFill>
-                  <a:srgbClr val="1419AB"/>
-                </a:solidFill>
-                <a:latin typeface="Pretendard SemiBold" panose="02000703000000020004" pitchFamily="2" charset="-127"/>
-                <a:ea typeface="Pretendard SemiBold" panose="02000703000000020004" pitchFamily="2" charset="-127"/>
-                <a:cs typeface="Pretendard SemiBold" panose="02000703000000020004" pitchFamily="2" charset="-127"/>
-              </a:rPr>
-              <a:t>4단계</a:t>
-            </a:r>
-            <a:endParaRPr lang="en-US" altLang="ko-KR" sz="1600" dirty="0">
-              <a:solidFill>
-                <a:srgbClr val="1419AB"/>
-              </a:solidFill>
-              <a:latin typeface="Pretendard SemiBold" panose="02000703000000020004" pitchFamily="2" charset="-127"/>
-              <a:ea typeface="Pretendard SemiBold" panose="02000703000000020004" pitchFamily="2" charset="-127"/>
-              <a:cs typeface="Pretendard SemiBold" panose="02000703000000020004" pitchFamily="2" charset="-127"/>
-            </a:endParaRPr>
-          </a:p>
-        </p:txBody>
-      </p:sp>
-      <p:sp>
-        <p:nvSpPr>
-          <p:cNvPr id="300" name="RQ300"/>
-          <p:cNvSpPr>
-            <a:spLocks noGrp="1"/>
-          </p:cNvSpPr>
-          <p:nvPr/>
-        </p:nvSpPr>
-        <p:spPr>
-          <a:xfrm>
-            <a:off x="2717592" y="4100515"/>
-            <a:ext cx="9414407" cy="6000"/>
-          </a:xfrm>
-          <a:prstGeom prst="rect">
-            <a:avLst/>
-          </a:prstGeom>
-          <a:solidFill>
-            <a:srgbClr val="CCCCCC"/>
-          </a:solidFill>
-        </p:spPr>
-      </p:sp>
-      <p:sp>
-        <p:nvSpPr>
-          <p:cNvPr id="301" name="RQ301"/>
-          <p:cNvSpPr>
-            <a:spLocks noGrp="1"/>
-          </p:cNvSpPr>
-          <p:nvPr/>
-        </p:nvSpPr>
-        <p:spPr>
-          <a:xfrm>
-            <a:off x="2717592" y="4136515"/>
-            <a:ext cx="9414407" cy="120000"/>
-          </a:xfrm>
-          <a:prstGeom prst="rect">
-            <a:avLst/>
-          </a:prstGeom>
-          <a:noFill/>
-        </p:spPr>
-        <p:txBody>
-          <a:bodyPr wrap="square" lIns="91440" tIns="45720" rIns="91440" bIns="45720" anchor="ctr"/>
-          <a:lstStyle/>
-          <a:p>
-            <a:pPr algn="ctr"/>
-            <a:r>
-              <a:rPr lang="ko-KR" dirty="0" sz="1000">
-                <a:solidFill>
-                  <a:srgbClr val="999999"/>
-                </a:solidFill>
-                <a:latin typeface="Pretendard"/>
-                <a:ea typeface="Pretendard"/>
-                <a:cs typeface="Pretendard"/>
-              </a:rPr>
-              <a:t>분기별 실행 계획</a:t>
-            </a:r>
-          </a:p>
-        </p:txBody>
-      </p:sp>
-      <p:sp>
-        <p:nvSpPr>
-          <p:cNvPr id="302" name="RD302"/>
-          <p:cNvSpPr>
-            <a:spLocks noGrp="1"/>
-          </p:cNvSpPr>
-          <p:nvPr/>
-        </p:nvSpPr>
-        <p:spPr>
-          <a:xfrm>
-            <a:off x="2717592" y="1499874"/>
-            <a:ext cx="2120346" cy="4000000"/>
-          </a:xfrm>
-          <a:prstGeom prst="rect">
-            <a:avLst/>
-          </a:prstGeom>
-          <a:noFill/>
-        </p:spPr>
-        <p:txBody>
-          <a:bodyPr wrap="square" lIns="152400" tIns="114300" rIns="152400" bIns="114300" anchor="t"/>
-          <a:lstStyle/>
-          <a:p>
-            <a:r>
-              <a:rPr lang="ko-KR" dirty="0" sz="1100" b="1">
-                <a:solidFill>
-                  <a:srgbClr val="3C41E6"/>
-                </a:solidFill>
-                <a:latin typeface="Pretendard"/>
-                <a:ea typeface="Pretendard"/>
-                <a:cs typeface="Pretendard"/>
-              </a:rPr>
-              <a:t>▷ 기술 Discovery</a:t>
-            </a:r>
-          </a:p>
-          <a:p>
-            <a:r>
-              <a:rPr lang="ko-KR" dirty="0" sz="500">
-                <a:latin typeface="Pretendard"/>
-                <a:ea typeface="Pretendard"/>
-                <a:cs typeface="Pretendard"/>
-              </a:rPr>
-              <a:t/>
-            </a:r>
-          </a:p>
-          <a:p>
-            <a:r>
-              <a:rPr lang="ko-KR" dirty="0" sz="1100">
-                <a:solidFill>
-                  <a:srgbClr val="444444"/>
-                </a:solidFill>
-                <a:latin typeface="Pretendard"/>
-                <a:ea typeface="Pretendard"/>
-                <a:cs typeface="Pretendard"/>
-              </a:rPr>
-              <a:t>고객 Pain Point 파악</a:t>
-            </a:r>
-          </a:p>
-          <a:p>
-            <a:r>
-              <a:rPr lang="ko-KR" dirty="0" sz="1100">
-                <a:solidFill>
-                  <a:srgbClr val="444444"/>
-                </a:solidFill>
-                <a:latin typeface="Pretendard"/>
-                <a:ea typeface="Pretendard"/>
-                <a:cs typeface="Pretendard"/>
-              </a:rPr>
-              <a:t>요구사항 심층 인터뷰</a:t>
-            </a:r>
-          </a:p>
-          <a:p>
-            <a:r>
-              <a:rPr lang="ko-KR" dirty="0" sz="1100">
-                <a:solidFill>
-                  <a:srgbClr val="444444"/>
-                </a:solidFill>
-                <a:latin typeface="Pretendard"/>
-                <a:ea typeface="Pretendard"/>
-                <a:cs typeface="Pretendard"/>
-              </a:rPr>
-              <a:t>현황 아키텍처 분석</a:t>
-            </a:r>
-          </a:p>
-        </p:txBody>
-      </p:sp>
-      <p:sp>
-        <p:nvSpPr>
-          <p:cNvPr id="303" name="RQ303"/>
-          <p:cNvSpPr>
-            <a:spLocks noGrp="1"/>
-          </p:cNvSpPr>
-          <p:nvPr/>
-        </p:nvSpPr>
-        <p:spPr>
-          <a:xfrm>
-            <a:off x="2717592" y="4547664"/>
-            <a:ext cx="2120346" cy="520000"/>
-          </a:xfrm>
-          <a:prstGeom prst="rect">
-            <a:avLst/>
-          </a:prstGeom>
-          <a:solidFill>
-            <a:srgbClr val="F4F6FE"/>
-          </a:solidFill>
-          <a:ln w="19050">
-            <a:solidFill>
-              <a:srgbClr val="3C41E6"/>
-            </a:solidFill>
-          </a:ln>
-        </p:spPr>
-        <p:txBody>
-          <a:bodyPr wrap="square" lIns="91440" tIns="45720" rIns="91440" bIns="45720" anchor="ctr"/>
-          <a:lstStyle/>
-          <a:p>
-            <a:pPr algn="ctr"/>
-            <a:r>
-              <a:rPr lang="ko-KR" dirty="0" sz="900" b="1">
-                <a:solidFill>
-                  <a:srgbClr val="3C41E6"/>
-                </a:solidFill>
-                <a:latin typeface="Pretendard"/>
-                <a:ea typeface="Pretendard"/>
-                <a:cs typeface="Pretendard"/>
-              </a:rPr>
-              <a:t>핵심 목표</a:t>
-            </a:r>
-          </a:p>
-          <a:p>
-            <a:pPr algn="ctr"/>
-            <a:r>
-              <a:rPr lang="ko-KR" dirty="0" sz="1100">
-                <a:solidFill>
-                  <a:srgbClr val="111111"/>
-                </a:solidFill>
-                <a:latin typeface="Pretendard"/>
-                <a:ea typeface="Pretendard"/>
-                <a:cs typeface="Pretendard"/>
-              </a:rPr>
-              <a:t>요구사항 문서 완료</a:t>
-            </a:r>
-          </a:p>
-        </p:txBody>
-      </p:sp>
-      <p:sp>
-        <p:nvSpPr>
-          <p:cNvPr id="304" name="RQ304"/>
-          <p:cNvSpPr>
-            <a:spLocks noGrp="1"/>
-          </p:cNvSpPr>
-          <p:nvPr/>
-        </p:nvSpPr>
-        <p:spPr>
-          <a:xfrm>
-            <a:off x="2717592" y="5187664"/>
-            <a:ext cx="2120346" cy="380000"/>
-          </a:xfrm>
-          <a:prstGeom prst="rect">
-            <a:avLst/>
-          </a:prstGeom>
-          <a:solidFill>
-            <a:srgbClr val="E8ECFC"/>
-          </a:solidFill>
-        </p:spPr>
-        <p:txBody>
-          <a:bodyPr wrap="square" lIns="91440" tIns="45720" rIns="91440" bIns="45720" anchor="ctr">
-            <a:normAutofit/>
-          </a:bodyPr>
-          <a:lstStyle/>
-          <a:p>
-            <a:pPr algn="ctr"/>
-            <a:r>
-              <a:rPr lang="ko-KR" dirty="0" sz="900" b="1">
-                <a:solidFill>
-                  <a:srgbClr val="3C41E6"/>
-                </a:solidFill>
-                <a:latin typeface="Pretendard"/>
-                <a:ea typeface="Pretendard"/>
-                <a:cs typeface="Pretendard"/>
-              </a:rPr>
-              <a:t>리스크</a:t>
-            </a:r>
-          </a:p>
-          <a:p>
-            <a:pPr algn="ctr"/>
-            <a:r>
-              <a:rPr lang="ko-KR" dirty="0" sz="1100">
-                <a:solidFill>
-                  <a:srgbClr val="888888"/>
-                </a:solidFill>
-                <a:latin typeface="Pretendard"/>
-                <a:ea typeface="Pretendard"/>
-                <a:cs typeface="Pretendard"/>
-              </a:rPr>
-              <a:t>요건 불명확 → 범위 확장</a:t>
-            </a:r>
-          </a:p>
-          <a:p>
-            <a:pPr algn="ctr"/>
-            <a:r>
-              <a:rPr lang="ko-KR" dirty="0" sz="900" b="0">
-                <a:latin typeface="Pretendard"/>
-                <a:ea typeface="Pretendard"/>
-                <a:cs typeface="Pretendard"/>
-                <a:solidFill>
-                  <a:srgbClr val="333333"/>
-                </a:solidFill>
-              </a:rPr>
-              <a:t>규모: FDE 1~2주</a:t>
-            </a:r>
-          </a:p>
-        </p:txBody>
-      </p:sp>
-      <p:sp>
-        <p:nvSpPr>
-          <p:cNvPr id="306" name="RD306"/>
-          <p:cNvSpPr>
-            <a:spLocks noGrp="1"/>
-          </p:cNvSpPr>
-          <p:nvPr/>
-        </p:nvSpPr>
-        <p:spPr>
-          <a:xfrm>
-            <a:off x="4957938" y="1499874"/>
-            <a:ext cx="2375782" cy="4000000"/>
-          </a:xfrm>
-          <a:prstGeom prst="rect">
-            <a:avLst/>
-          </a:prstGeom>
-          <a:noFill/>
-        </p:spPr>
-        <p:txBody>
-          <a:bodyPr wrap="square" lIns="152400" tIns="114300" rIns="152400" bIns="114300" anchor="t"/>
-          <a:lstStyle/>
-          <a:p>
-            <a:r>
-              <a:rPr lang="ko-KR" dirty="0" sz="1100" b="1">
-                <a:solidFill>
-                  <a:srgbClr val="2D30B8"/>
-                </a:solidFill>
-                <a:latin typeface="Pretendard"/>
-                <a:ea typeface="Pretendard"/>
-                <a:cs typeface="Pretendard"/>
-              </a:rPr>
-              <a:t>▷ PoC 설계</a:t>
-            </a:r>
-          </a:p>
-          <a:p>
-            <a:r>
-              <a:rPr lang="ko-KR" dirty="0" sz="500">
-                <a:latin typeface="Pretendard"/>
-                <a:ea typeface="Pretendard"/>
-                <a:cs typeface="Pretendard"/>
-              </a:rPr>
-              <a:t/>
-            </a:r>
-          </a:p>
-          <a:p>
-            <a:r>
-              <a:rPr lang="ko-KR" dirty="0" sz="1100">
-                <a:solidFill>
-                  <a:srgbClr val="444444"/>
-                </a:solidFill>
-                <a:latin typeface="Pretendard"/>
-                <a:ea typeface="Pretendard"/>
-                <a:cs typeface="Pretendard"/>
-              </a:rPr>
-              <a:t>AWS AI 서비스 선정</a:t>
-            </a:r>
-          </a:p>
-          <a:p>
-            <a:r>
-              <a:rPr lang="ko-KR" dirty="0" sz="1100">
-                <a:solidFill>
-                  <a:srgbClr val="444444"/>
-                </a:solidFill>
-                <a:latin typeface="Pretendard"/>
-                <a:ea typeface="Pretendard"/>
-                <a:cs typeface="Pretendard"/>
-              </a:rPr>
-              <a:t>검증 시나리오 정의</a:t>
-            </a:r>
-          </a:p>
-          <a:p>
-            <a:r>
-              <a:rPr lang="ko-KR" dirty="0" sz="1100">
-                <a:solidFill>
-                  <a:srgbClr val="444444"/>
-                </a:solidFill>
-                <a:latin typeface="Pretendard"/>
-                <a:ea typeface="Pretendard"/>
-                <a:cs typeface="Pretendard"/>
-              </a:rPr>
-              <a:t>성공 기준(KPI) 수립</a:t>
-            </a:r>
-          </a:p>
-        </p:txBody>
-      </p:sp>
-      <p:sp>
-        <p:nvSpPr>
-          <p:cNvPr id="307" name="RQ307"/>
-          <p:cNvSpPr>
-            <a:spLocks noGrp="1"/>
-          </p:cNvSpPr>
-          <p:nvPr/>
-        </p:nvSpPr>
-        <p:spPr>
-          <a:xfrm>
-            <a:off x="4957938" y="4547664"/>
-            <a:ext cx="2375782" cy="520000"/>
-          </a:xfrm>
-          <a:prstGeom prst="rect">
-            <a:avLst/>
-          </a:prstGeom>
-          <a:solidFill>
-            <a:srgbClr val="F4F6FE"/>
-          </a:solidFill>
-          <a:ln w="19050">
-            <a:solidFill>
-              <a:srgbClr val="2D30B8"/>
-            </a:solidFill>
-          </a:ln>
-        </p:spPr>
-        <p:txBody>
-          <a:bodyPr wrap="square" lIns="91440" tIns="45720" rIns="91440" bIns="45720" anchor="ctr"/>
-          <a:lstStyle/>
-          <a:p>
-            <a:pPr algn="ctr"/>
-            <a:r>
-              <a:rPr lang="ko-KR" dirty="0" sz="900" b="1">
-                <a:solidFill>
-                  <a:srgbClr val="2D30B8"/>
-                </a:solidFill>
-                <a:latin typeface="Pretendard"/>
-                <a:ea typeface="Pretendard"/>
-                <a:cs typeface="Pretendard"/>
-              </a:rPr>
-              <a:t>핵심 목표</a:t>
-            </a:r>
-          </a:p>
-          <a:p>
-            <a:pPr algn="ctr"/>
-            <a:r>
-              <a:rPr lang="ko-KR" dirty="0" sz="1100">
-                <a:solidFill>
-                  <a:srgbClr val="111111"/>
-                </a:solidFill>
-                <a:latin typeface="Pretendard"/>
-                <a:ea typeface="Pretendard"/>
-                <a:cs typeface="Pretendard"/>
-              </a:rPr>
-              <a:t>PoC 완료율 100%</a:t>
-            </a:r>
-          </a:p>
-        </p:txBody>
-      </p:sp>
-      <p:sp>
-        <p:nvSpPr>
-          <p:cNvPr id="308" name="RQ308"/>
-          <p:cNvSpPr>
-            <a:spLocks noGrp="1"/>
-          </p:cNvSpPr>
-          <p:nvPr/>
-        </p:nvSpPr>
-        <p:spPr>
-          <a:xfrm>
-            <a:off x="4957938" y="5187664"/>
-            <a:ext cx="2255782" cy="380000"/>
-          </a:xfrm>
-          <a:prstGeom prst="rect">
-            <a:avLst/>
-          </a:prstGeom>
-          <a:solidFill>
-            <a:srgbClr val="D4DCFB"/>
-          </a:solidFill>
-        </p:spPr>
-        <p:txBody>
-          <a:bodyPr wrap="square" lIns="91440" tIns="45720" rIns="91440" bIns="45720" anchor="ctr">
-            <a:normAutofit/>
-          </a:bodyPr>
-          <a:lstStyle/>
-          <a:p>
-            <a:pPr algn="ctr"/>
-            <a:r>
-              <a:rPr lang="ko-KR" dirty="0" sz="900" b="1">
-                <a:solidFill>
-                  <a:srgbClr val="2D30B8"/>
-                </a:solidFill>
-                <a:latin typeface="Pretendard"/>
-                <a:ea typeface="Pretendard"/>
-                <a:cs typeface="Pretendard"/>
-              </a:rPr>
-              <a:t>리스크</a:t>
-            </a:r>
-          </a:p>
-          <a:p>
-            <a:pPr algn="ctr"/>
-            <a:r>
-              <a:rPr lang="ko-KR" dirty="0" sz="1100">
-                <a:solidFill>
-                  <a:srgbClr val="888888"/>
-                </a:solidFill>
-                <a:latin typeface="Pretendard"/>
-                <a:ea typeface="Pretendard"/>
-                <a:cs typeface="Pretendard"/>
-              </a:rPr>
-              <a:t>기술 적합성 미검증</a:t>
-            </a:r>
-          </a:p>
-          <a:p>
-            <a:pPr algn="ctr"/>
-            <a:r>
-              <a:rPr lang="ko-KR" dirty="0" sz="900" b="0">
-                <a:latin typeface="Pretendard"/>
-                <a:ea typeface="Pretendard"/>
-                <a:cs typeface="Pretendard"/>
-                <a:solidFill>
-                  <a:srgbClr val="333333"/>
-                </a:solidFill>
-              </a:rPr>
-              <a:t>규모: FDE 2~4주</a:t>
-            </a:r>
-          </a:p>
-        </p:txBody>
-      </p:sp>
-      <p:sp>
-        <p:nvSpPr>
-          <p:cNvPr id="310" name="RD310"/>
-          <p:cNvSpPr>
-            <a:spLocks noGrp="1"/>
-          </p:cNvSpPr>
-          <p:nvPr/>
-        </p:nvSpPr>
-        <p:spPr>
-          <a:xfrm>
-            <a:off x="7453720" y="1499874"/>
-            <a:ext cx="2182497" cy="4000000"/>
-          </a:xfrm>
-          <a:prstGeom prst="rect">
-            <a:avLst/>
-          </a:prstGeom>
-          <a:noFill/>
-        </p:spPr>
-        <p:txBody>
-          <a:bodyPr wrap="square" lIns="152400" tIns="114300" rIns="152400" bIns="114300" anchor="t"/>
-          <a:lstStyle/>
-          <a:p>
-            <a:r>
-              <a:rPr lang="ko-KR" dirty="0" sz="1100" b="1">
-                <a:solidFill>
-                  <a:srgbClr val="1E2490"/>
-                </a:solidFill>
-                <a:latin typeface="Pretendard"/>
-                <a:ea typeface="Pretendard"/>
-                <a:cs typeface="Pretendard"/>
-              </a:rPr>
-              <a:t>▷ 아키텍처 제안</a:t>
-            </a:r>
-          </a:p>
-          <a:p>
-            <a:r>
-              <a:rPr lang="ko-KR" dirty="0" sz="500">
-                <a:latin typeface="Pretendard"/>
-                <a:ea typeface="Pretendard"/>
-                <a:cs typeface="Pretendard"/>
-              </a:rPr>
-              <a:t/>
-            </a:r>
-          </a:p>
-          <a:p>
-            <a:r>
-              <a:rPr lang="ko-KR" dirty="0" sz="1100">
-                <a:solidFill>
-                  <a:srgbClr val="444444"/>
-                </a:solidFill>
-                <a:latin typeface="Pretendard"/>
-                <a:ea typeface="Pretendard"/>
-                <a:cs typeface="Pretendard"/>
-              </a:rPr>
-              <a:t>비용·성능·보안 최적화</a:t>
-            </a:r>
-          </a:p>
-          <a:p>
-            <a:r>
-              <a:rPr lang="ko-KR" dirty="0" sz="1100">
-                <a:solidFill>
-                  <a:srgbClr val="444444"/>
-                </a:solidFill>
-                <a:latin typeface="Pretendard"/>
-                <a:ea typeface="Pretendard"/>
-                <a:cs typeface="Pretendard"/>
-              </a:rPr>
-              <a:t>레퍼런스 아키텍처 작성</a:t>
-            </a:r>
-          </a:p>
-          <a:p>
-            <a:r>
-              <a:rPr lang="ko-KR" dirty="0" sz="1100">
-                <a:solidFill>
-                  <a:srgbClr val="444444"/>
-                </a:solidFill>
-                <a:latin typeface="Pretendard"/>
-                <a:ea typeface="Pretendard"/>
-                <a:cs typeface="Pretendard"/>
-              </a:rPr>
-              <a:t>Well-Architected Review</a:t>
-            </a:r>
-          </a:p>
-        </p:txBody>
-      </p:sp>
-      <p:sp>
-        <p:nvSpPr>
-          <p:cNvPr id="311" name="RQ311"/>
-          <p:cNvSpPr>
-            <a:spLocks noGrp="1"/>
-          </p:cNvSpPr>
-          <p:nvPr/>
-        </p:nvSpPr>
-        <p:spPr>
-          <a:xfrm>
-            <a:off x="7453720" y="4547664"/>
-            <a:ext cx="2182497" cy="520000"/>
-          </a:xfrm>
-          <a:prstGeom prst="rect">
-            <a:avLst/>
-          </a:prstGeom>
-          <a:solidFill>
-            <a:srgbClr val="F4F6FE"/>
-          </a:solidFill>
-          <a:ln w="19050">
-            <a:solidFill>
-              <a:srgbClr val="1E2490"/>
-            </a:solidFill>
-          </a:ln>
-        </p:spPr>
-        <p:txBody>
-          <a:bodyPr wrap="square" lIns="91440" tIns="45720" rIns="91440" bIns="45720" anchor="ctr"/>
-          <a:lstStyle/>
-          <a:p>
-            <a:pPr algn="ctr"/>
-            <a:r>
-              <a:rPr lang="ko-KR" dirty="0" sz="900" b="1">
-                <a:solidFill>
-                  <a:srgbClr val="1E2490"/>
-                </a:solidFill>
-                <a:latin typeface="Pretendard"/>
-                <a:ea typeface="Pretendard"/>
-                <a:cs typeface="Pretendard"/>
-              </a:rPr>
-              <a:t>핵심 목표</a:t>
-            </a:r>
-          </a:p>
-          <a:p>
-            <a:pPr algn="ctr"/>
-            <a:r>
-              <a:rPr lang="ko-KR" dirty="0" sz="1100">
-                <a:solidFill>
-                  <a:srgbClr val="111111"/>
-                </a:solidFill>
-                <a:latin typeface="Pretendard"/>
-                <a:ea typeface="Pretendard"/>
-                <a:cs typeface="Pretendard"/>
-              </a:rPr>
-              <a:t>WAR 통과 / 제안서 승인</a:t>
-            </a:r>
-          </a:p>
-        </p:txBody>
-      </p:sp>
-      <p:sp>
-        <p:nvSpPr>
-          <p:cNvPr id="312" name="RQ312"/>
-          <p:cNvSpPr>
-            <a:spLocks noGrp="1"/>
-          </p:cNvSpPr>
-          <p:nvPr/>
-        </p:nvSpPr>
-        <p:spPr>
-          <a:xfrm>
-            <a:off x="7453720" y="5187664"/>
-            <a:ext cx="2062497" cy="380000"/>
-          </a:xfrm>
-          <a:prstGeom prst="rect">
-            <a:avLst/>
-          </a:prstGeom>
-          <a:solidFill>
-            <a:srgbClr val="C0CCFA"/>
-          </a:solidFill>
-        </p:spPr>
-        <p:txBody>
-          <a:bodyPr wrap="square" lIns="91440" tIns="45720" rIns="91440" bIns="45720" anchor="ctr">
-            <a:normAutofit/>
-          </a:bodyPr>
-          <a:lstStyle/>
-          <a:p>
-            <a:pPr algn="ctr"/>
-            <a:r>
-              <a:rPr lang="ko-KR" dirty="0" sz="900" b="1">
-                <a:solidFill>
-                  <a:srgbClr val="1E2490"/>
-                </a:solidFill>
-                <a:latin typeface="Pretendard"/>
-                <a:ea typeface="Pretendard"/>
-                <a:cs typeface="Pretendard"/>
-              </a:rPr>
-              <a:t>리스크</a:t>
-            </a:r>
-          </a:p>
-          <a:p>
-            <a:pPr algn="ctr"/>
-            <a:r>
-              <a:rPr lang="ko-KR" dirty="0" sz="1100">
-                <a:solidFill>
-                  <a:srgbClr val="888888"/>
-                </a:solidFill>
-                <a:latin typeface="Pretendard"/>
-                <a:ea typeface="Pretendard"/>
-                <a:cs typeface="Pretendard"/>
-              </a:rPr>
-              <a:t>예산 불일치 → 재설계</a:t>
-            </a:r>
-          </a:p>
-          <a:p>
-            <a:pPr algn="ctr"/>
-            <a:r>
-              <a:rPr lang="ko-KR" dirty="0" sz="900" b="0">
-                <a:latin typeface="Pretendard"/>
-                <a:ea typeface="Pretendard"/>
-                <a:cs typeface="Pretendard"/>
-                <a:solidFill>
-                  <a:srgbClr val="333333"/>
-                </a:solidFill>
-              </a:rPr>
-              <a:t>규모: FDE 1~2주</a:t>
-            </a:r>
-          </a:p>
-        </p:txBody>
-      </p:sp>
-      <p:sp>
-        <p:nvSpPr>
-          <p:cNvPr id="314" name="RD314"/>
-          <p:cNvSpPr>
-            <a:spLocks noGrp="1"/>
-          </p:cNvSpPr>
-          <p:nvPr/>
-        </p:nvSpPr>
-        <p:spPr>
-          <a:xfrm>
-            <a:off x="9756217" y="1499874"/>
-            <a:ext cx="2375782" cy="4000000"/>
-          </a:xfrm>
-          <a:prstGeom prst="rect">
-            <a:avLst/>
-          </a:prstGeom>
-          <a:noFill/>
-        </p:spPr>
-        <p:txBody>
-          <a:bodyPr wrap="square" lIns="152400" tIns="114300" rIns="152400" bIns="114300" anchor="t"/>
-          <a:lstStyle/>
-          <a:p>
-            <a:r>
-              <a:rPr lang="ko-KR" dirty="0" sz="1100" b="1">
-                <a:solidFill>
-                  <a:srgbClr val="1419AB"/>
-                </a:solidFill>
-                <a:latin typeface="Pretendard"/>
-                <a:ea typeface="Pretendard"/>
-                <a:cs typeface="Pretendard"/>
-              </a:rPr>
-              <a:t>▷ 딜 클로징 지원</a:t>
-            </a:r>
-          </a:p>
-          <a:p>
-            <a:r>
-              <a:rPr lang="ko-KR" dirty="0" sz="500">
-                <a:latin typeface="Pretendard"/>
-                <a:ea typeface="Pretendard"/>
-                <a:cs typeface="Pretendard"/>
-              </a:rPr>
-              <a:t/>
-            </a:r>
-          </a:p>
-          <a:p>
-            <a:r>
-              <a:rPr lang="ko-KR" dirty="0" sz="1100">
-                <a:solidFill>
-                  <a:srgbClr val="444444"/>
-                </a:solidFill>
-                <a:latin typeface="Pretendard"/>
-                <a:ea typeface="Pretendard"/>
-                <a:cs typeface="Pretendard"/>
-              </a:rPr>
-              <a:t>ROI 문서화</a:t>
-            </a:r>
-          </a:p>
-          <a:p>
-            <a:r>
-              <a:rPr lang="ko-KR" dirty="0" sz="1100">
-                <a:solidFill>
-                  <a:srgbClr val="444444"/>
-                </a:solidFill>
-                <a:latin typeface="Pretendard"/>
-                <a:ea typeface="Pretendard"/>
-                <a:cs typeface="Pretendard"/>
-              </a:rPr>
-              <a:t>경영진 프레젠테이션</a:t>
-            </a:r>
-          </a:p>
-          <a:p>
-            <a:r>
-              <a:rPr lang="ko-KR" dirty="0" sz="1100">
-                <a:solidFill>
-                  <a:srgbClr val="444444"/>
-                </a:solidFill>
-                <a:latin typeface="Pretendard"/>
-                <a:ea typeface="Pretendard"/>
-                <a:cs typeface="Pretendard"/>
-              </a:rPr>
-              <a:t>계약 기술 지원</a:t>
-            </a:r>
-          </a:p>
-        </p:txBody>
-      </p:sp>
-      <p:sp>
-        <p:nvSpPr>
-          <p:cNvPr id="315" name="RQ315"/>
-          <p:cNvSpPr>
-            <a:spLocks noGrp="1"/>
-          </p:cNvSpPr>
-          <p:nvPr/>
-        </p:nvSpPr>
-        <p:spPr>
-          <a:xfrm>
-            <a:off x="9756217" y="4547664"/>
-            <a:ext cx="2375782" cy="520000"/>
-          </a:xfrm>
-          <a:prstGeom prst="rect">
-            <a:avLst/>
-          </a:prstGeom>
-          <a:solidFill>
-            <a:srgbClr val="F4F6FE"/>
-          </a:solidFill>
-          <a:ln w="19050">
-            <a:solidFill>
-              <a:srgbClr val="1419AB"/>
-            </a:solidFill>
-          </a:ln>
-        </p:spPr>
-        <p:txBody>
-          <a:bodyPr wrap="square" lIns="91440" tIns="45720" rIns="91440" bIns="45720" anchor="ctr"/>
-          <a:lstStyle/>
-          <a:p>
-            <a:pPr algn="ctr"/>
-            <a:r>
-              <a:rPr lang="ko-KR" dirty="0" sz="900" b="1">
-                <a:solidFill>
-                  <a:srgbClr val="1419AB"/>
-                </a:solidFill>
-                <a:latin typeface="Pretendard"/>
-                <a:ea typeface="Pretendard"/>
-                <a:cs typeface="Pretendard"/>
-              </a:rPr>
-              <a:t>핵심 목표</a:t>
-            </a:r>
-          </a:p>
-          <a:p>
-            <a:pPr algn="ctr"/>
-            <a:r>
-              <a:rPr lang="ko-KR" dirty="0" sz="1100">
-                <a:solidFill>
-                  <a:srgbClr val="111111"/>
-                </a:solidFill>
-                <a:latin typeface="Pretendard"/>
-                <a:ea typeface="Pretendard"/>
-                <a:cs typeface="Pretendard"/>
-              </a:rPr>
-              <a:t>계약 전환율 향상</a:t>
-            </a:r>
-          </a:p>
-        </p:txBody>
-      </p:sp>
-      <p:sp>
-        <p:nvSpPr>
-          <p:cNvPr id="316" name="RQ316"/>
-          <p:cNvSpPr>
-            <a:spLocks noGrp="1"/>
-          </p:cNvSpPr>
-          <p:nvPr/>
-        </p:nvSpPr>
-        <p:spPr>
-          <a:xfrm>
-            <a:off x="9756217" y="5187664"/>
-            <a:ext cx="2255782" cy="380000"/>
-          </a:xfrm>
-          <a:prstGeom prst="rect">
-            <a:avLst/>
-          </a:prstGeom>
-          <a:solidFill>
-            <a:srgbClr val="AABBF9"/>
-          </a:solidFill>
-        </p:spPr>
-        <p:txBody>
-          <a:bodyPr wrap="square" lIns="91440" tIns="45720" rIns="91440" bIns="45720" anchor="ctr">
-            <a:normAutofit/>
-          </a:bodyPr>
-          <a:lstStyle/>
-          <a:p>
-            <a:pPr algn="ctr"/>
-            <a:r>
-              <a:rPr lang="ko-KR" dirty="0" sz="900" b="1">
-                <a:solidFill>
-                  <a:srgbClr val="1419AB"/>
-                </a:solidFill>
-                <a:latin typeface="Pretendard"/>
-                <a:ea typeface="Pretendard"/>
-                <a:cs typeface="Pretendard"/>
-              </a:rPr>
-              <a:t>리스크</a:t>
-            </a:r>
-          </a:p>
-          <a:p>
-            <a:pPr algn="ctr"/>
-            <a:r>
-              <a:rPr lang="ko-KR" dirty="0" sz="1100">
-                <a:solidFill>
-                  <a:srgbClr val="888888"/>
-                </a:solidFill>
-                <a:latin typeface="Pretendard"/>
-                <a:ea typeface="Pretendard"/>
-                <a:cs typeface="Pretendard"/>
-              </a:rPr>
-              <a:t>경영진 기술 이해 부족</a:t>
-            </a:r>
-          </a:p>
-          <a:p>
-            <a:pPr algn="ctr"/>
-            <a:r>
-              <a:rPr lang="ko-KR" dirty="0" sz="900" b="0">
-                <a:latin typeface="Pretendard"/>
-                <a:ea typeface="Pretendard"/>
-                <a:cs typeface="Pretendard"/>
-                <a:solidFill>
-                  <a:srgbClr val="333333"/>
-                </a:solidFill>
-              </a:rPr>
-              <a:t>규모: FDE 1주</a:t>
-            </a:r>
-          </a:p>
-        </p:txBody>
-      </p:sp>
-    </p:spTree>
-    <p:extLst>
-      <p:ext uri="{BB962C8B-B14F-4D97-AF65-F5344CB8AC3E}">
-        <p14:creationId val="3958239633"/>
-      </p:ext>
-    </p:extLst>
-  </p:cSld>
-  <p:clrMapOvr>
-    <a:masterClrMapping/>
-  </p:clrMapOvr>
-</p:sld>
+<ns0:sld xmlns:ns0="http://schemas.openxmlformats.org/presentationml/2006/main" xmlns:ns1="http://schemas.openxmlformats.org/drawingml/2006/main" xmlns:ns2="http://schemas.microsoft.com/office/powerpoint/2010/main">
+  <ns0:cSld>
+    <ns0:spTree>
+      <ns0:nvGrpSpPr>
+        <ns0:cNvPr id="1" name=""/>
+        <ns0:cNvGrpSpPr/>
+        <ns0:nvPr/>
+      </ns0:nvGrpSpPr>
+      <ns0:grpSpPr>
+        <ns1:xfrm>
+          <ns1:off x="0" y="0"/>
+          <ns1:ext cx="0" cy="0"/>
+          <ns1:chOff x="0" y="0"/>
+          <ns1:chExt cx="0" cy="0"/>
+        </ns1:xfrm>
+      </ns0:grpSpPr>
+      <ns0:sp>
+        <ns0:nvSpPr>
+          <ns0:cNvPr id="13" name="직사각형 12"/>
+          <ns0:cNvSpPr/>
+          <ns0:nvPr/>
+        </ns0:nvSpPr>
+        <ns0:spPr>
+          <ns1:xfrm>
+            <ns1:off x="4897938" y="838200"/>
+            <ns1:ext cx="2495782" cy="6020378"/>
+          </ns1:xfrm>
+          <ns1:prstGeom prst="rect">
+            <ns1:avLst/>
+          </ns1:prstGeom>
+          <ns1:solidFill>
+            <ns1:schemeClr val="bg1">
+              <ns1:lumMod val="85000"/>
+              <ns1:alpha val="64000"/>
+            </ns1:schemeClr>
+          </ns1:solidFill>
+          <ns1:ln>
+            <ns1:noFill/>
+          </ns1:ln>
+        </ns0:spPr>
+        <ns0:style>
+          <ns1:lnRef idx="2">
+            <ns1:schemeClr val="accent1">
+              <ns1:shade val="50000"/>
+            </ns1:schemeClr>
+          </ns1:lnRef>
+          <ns1:fillRef idx="1">
+            <ns1:schemeClr val="accent1"/>
+          </ns1:fillRef>
+          <ns1:effectRef idx="0">
+            <ns1:schemeClr val="accent1"/>
+          </ns1:effectRef>
+          <ns1:fontRef idx="minor">
+            <ns1:schemeClr val="lt1"/>
+          </ns1:fontRef>
+        </ns0:style>
+        <ns0:txBody>
+          <ns1:bodyPr rtlCol="0" anchor="ctr"/>
+          <ns1:lstStyle/>
+          <ns1:p>
+            <ns1:pPr algn="ctr"/>
+            <ns1:endParaRPr lang="ko-KR" altLang="en-US" dirty="0"/>
+          </ns1:p>
+        </ns0:txBody>
+      </ns0:sp>
+      <ns0:sp>
+        <ns0:nvSpPr>
+          <ns0:cNvPr id="15" name="직사각형 14"/>
+          <ns0:cNvSpPr/>
+          <ns0:nvPr/>
+        </ns0:nvSpPr>
+        <ns0:spPr>
+          <ns1:xfrm>
+            <ns1:off x="9696217" y="838200"/>
+            <ns1:ext cx="2495782" cy="6020378"/>
+          </ns1:xfrm>
+          <ns1:prstGeom prst="rect">
+            <ns1:avLst/>
+          </ns1:prstGeom>
+          <ns1:solidFill>
+            <ns1:schemeClr val="bg1">
+              <ns1:lumMod val="85000"/>
+              <ns1:alpha val="64000"/>
+            </ns1:schemeClr>
+          </ns1:solidFill>
+          <ns1:ln>
+            <ns1:noFill/>
+          </ns1:ln>
+        </ns0:spPr>
+        <ns0:style>
+          <ns1:lnRef idx="2">
+            <ns1:schemeClr val="accent1">
+              <ns1:shade val="50000"/>
+            </ns1:schemeClr>
+          </ns1:lnRef>
+          <ns1:fillRef idx="1">
+            <ns1:schemeClr val="accent1"/>
+          </ns1:fillRef>
+          <ns1:effectRef idx="0">
+            <ns1:schemeClr val="accent1"/>
+          </ns1:effectRef>
+          <ns1:fontRef idx="minor">
+            <ns1:schemeClr val="lt1"/>
+          </ns1:fontRef>
+        </ns0:style>
+        <ns0:txBody>
+          <ns1:bodyPr rtlCol="0" anchor="ctr"/>
+          <ns1:lstStyle/>
+          <ns1:p>
+            <ns1:pPr algn="ctr"/>
+            <ns1:endParaRPr lang="ko-KR" altLang="en-US" dirty="0"/>
+          </ns1:p>
+        </ns0:txBody>
+      </ns0:sp>
+      <ns0:sp>
+        <ns0:nvSpPr>
+          <ns0:cNvPr id="8" name="제목 7"/>
+          <ns0:cNvSpPr>
+            <ns1:spLocks noGrp="1"/>
+          </ns0:cNvSpPr>
+          <ns0:nvPr>
+            <ns0:ph type="title"/>
+          </ns0:nvPr>
+        </ns0:nvSpPr>
+        <ns0:spPr/>
+        <ns0:txBody>
+          <ns1:bodyPr>
+            <ns1:normAutofit/>
+          </ns1:bodyPr>
+          <ns1:lstStyle/>
+          <ns1:p>
+            <ns1:r>
+              <ns1:rPr lang="ko-KR" altLang="ko-KR" dirty="0" smtClean="0"/>
+              <ns1:t>고객 세일즈 사이클과 FDE 개입 전략</ns1:t>
+            </ns1:r>
+            <ns1:endParaRPr lang="ko-KR" altLang="en-US" dirty="0"/>
+          </ns1:p>
+        </ns0:txBody>
+      </ns0:sp>
+      <ns0:sp>
+        <ns0:nvSpPr>
+          <ns0:cNvPr id="9" name="내용 개체 틀 8"/>
+          <ns0:cNvSpPr>
+            <ns1:spLocks noGrp="1"/>
+          </ns0:cNvSpPr>
+          <ns0:nvPr>
+            <ns0:ph sz="quarter" idx="10"/>
+          </ns0:nvPr>
+        </ns0:nvSpPr>
+        <ns0:spPr/>
+        <ns0:txBody>
+          <ns1:bodyPr/>
+          <ns1:lstStyle/>
+          <ns1:p>
+            <ns1:r>
+              <ns1:rPr lang="ko-KR" altLang="ko-KR" dirty="0" smtClean="0"/>
+              <ns1:t>03 세일즈 사이클 단계별 FDE 역할</ns1:t>
+            </ns1:r>
+            <ns1:endParaRPr lang="ko-KR" altLang="en-US" dirty="0"/>
+          </ns1:p>
+        </ns0:txBody>
+      </ns0:sp>
+      <ns0:sp>
+        <ns0:nvSpPr>
+          <ns0:cNvPr id="17" name="Text 1"/>
+          <ns0:cNvSpPr/>
+          <ns0:nvPr/>
+        </ns0:nvSpPr>
+        <ns0:spPr>
+          <ns1:xfrm>
+            <ns1:off x="395032" y="780494"/>
+            <ns1:ext cx="2200409" cy="1196321"/>
+          </ns1:xfrm>
+          <ns1:prstGeom prst="rect">
+            <ns1:avLst/>
+          </ns1:prstGeom>
+          <ns1:noFill/>
+          <ns1:ln/>
+        </ns0:spPr>
+        <ns0:txBody>
+          <ns1:bodyPr wrap="square" lIns="0" tIns="0" rIns="0" bIns="0" rtlCol="0" anchor="t"/>
+          <ns1:lstStyle/>
+          <ns1:p>
+            <ns1:r>
+              <ns1:rPr lang="ko-KR" altLang="ko-KR" dirty="0" smtClean="0">
+                <ns1:solidFill>
+                  <ns1:schemeClr val="tx1">
+                    <ns1:lumMod val="85000"/>
+                    <ns1:lumOff val="15000"/>
+                  </ns1:schemeClr>
+                </ns1:solidFill>
+                <ns1:latin typeface="Pretendard SemiBold" panose="02000703000000020004" pitchFamily="2" charset="-127"/>
+                <ns1:ea typeface="Pretendard SemiBold" panose="02000703000000020004" pitchFamily="2" charset="-127"/>
+                <ns1:cs typeface="Pretendard SemiBold" panose="02000703000000020004" pitchFamily="2" charset="-127"/>
+              </ns1:rPr>
+              <ns1:t>3. FDE 세일즈 개입 4단계 프로세스</ns1:t>
+            </ns1:r>
+          </ns1:p>
+          <ns1:p>
+            <ns1:r>
+              <ns1:rPr lang="ko-KR" altLang="en-US" dirty="0" smtClean="0">
+                <ns1:solidFill>
+                  <ns1:schemeClr val="tx1">
+                    <ns1:lumMod val="85000"/>
+                    <ns1:lumOff val="15000"/>
+                  </ns1:schemeClr>
+                </ns1:solidFill>
+                <ns1:latin typeface="Pretendard SemiBold" panose="02000703000000020004" pitchFamily="2" charset="-127"/>
+                <ns1:ea typeface="Pretendard SemiBold" panose="02000703000000020004" pitchFamily="2" charset="-127"/>
+                <ns1:cs typeface="Pretendard SemiBold" panose="02000703000000020004" pitchFamily="2" charset="-127"/>
+              </ns1:rPr>
+              <ns1:t/>
+            </ns1:r>
+            <ns1:endParaRPr lang="en-US" altLang="ko-KR" dirty="0" smtClean="0">
+              <ns1:solidFill>
+                <ns1:schemeClr val="tx1">
+                  <ns1:lumMod val="85000"/>
+                  <ns1:lumOff val="15000"/>
+                </ns1:schemeClr>
+              </ns1:solidFill>
+              <ns1:latin typeface="Pretendard SemiBold" panose="02000703000000020004" pitchFamily="2" charset="-127"/>
+              <ns1:ea typeface="Pretendard SemiBold" panose="02000703000000020004" pitchFamily="2" charset="-127"/>
+              <ns1:cs typeface="Pretendard SemiBold" panose="02000703000000020004" pitchFamily="2" charset="-127"/>
+            </ns1:endParaRPr>
+          </ns1:p>
+          <ns1:p>
+            <ns1:r>
+              <ns1:rPr lang="ko-KR" altLang="en-US" dirty="0" smtClean="0">
+                <ns1:solidFill>
+                  <ns1:schemeClr val="tx1">
+                    <ns1:lumMod val="85000"/>
+                    <ns1:lumOff val="15000"/>
+                  </ns1:schemeClr>
+                </ns1:solidFill>
+                <ns1:latin typeface="Pretendard SemiBold" panose="02000703000000020004" pitchFamily="2" charset="-127"/>
+                <ns1:ea typeface="Pretendard SemiBold" panose="02000703000000020004" pitchFamily="2" charset="-127"/>
+                <ns1:cs typeface="Pretendard SemiBold" panose="02000703000000020004" pitchFamily="2" charset="-127"/>
+              </ns1:rPr>
+              <ns1:t/>
+            </ns1:r>
+            <ns1:r>
+              <ns1:rPr lang="en-US" altLang="ko-KR" dirty="0" smtClean="0">
+                <ns1:solidFill>
+                  <ns1:schemeClr val="tx1">
+                    <ns1:lumMod val="85000"/>
+                    <ns1:lumOff val="15000"/>
+                  </ns1:schemeClr>
+                </ns1:solidFill>
+                <ns1:latin typeface="Pretendard SemiBold" panose="02000703000000020004" pitchFamily="2" charset="-127"/>
+                <ns1:ea typeface="Pretendard SemiBold" panose="02000703000000020004" pitchFamily="2" charset="-127"/>
+                <ns1:cs typeface="Pretendard SemiBold" panose="02000703000000020004" pitchFamily="2" charset="-127"/>
+              </ns1:rPr>
+              <ns1:t/>
+            </ns1:r>
+            <ns1:r>
+              <ns1:rPr lang="ko-KR" altLang="en-US" dirty="0" smtClean="0">
+                <ns1:solidFill>
+                  <ns1:schemeClr val="tx1">
+                    <ns1:lumMod val="85000"/>
+                    <ns1:lumOff val="15000"/>
+                  </ns1:schemeClr>
+                </ns1:solidFill>
+                <ns1:latin typeface="Pretendard SemiBold" panose="02000703000000020004" pitchFamily="2" charset="-127"/>
+                <ns1:ea typeface="Pretendard SemiBold" panose="02000703000000020004" pitchFamily="2" charset="-127"/>
+                <ns1:cs typeface="Pretendard SemiBold" panose="02000703000000020004" pitchFamily="2" charset="-127"/>
+              </ns1:rPr>
+              <ns1:t/>
+            </ns1:r>
+            <ns1:r>
+              <ns1:rPr lang="en-US" altLang="ko-KR" dirty="0" smtClean="0">
+                <ns1:solidFill>
+                  <ns1:schemeClr val="tx1">
+                    <ns1:lumMod val="85000"/>
+                    <ns1:lumOff val="15000"/>
+                  </ns1:schemeClr>
+                </ns1:solidFill>
+                <ns1:latin typeface="Pretendard SemiBold" panose="02000703000000020004" pitchFamily="2" charset="-127"/>
+                <ns1:ea typeface="Pretendard SemiBold" panose="02000703000000020004" pitchFamily="2" charset="-127"/>
+                <ns1:cs typeface="Pretendard SemiBold" panose="02000703000000020004" pitchFamily="2" charset="-127"/>
+              </ns1:rPr>
+              <ns1:t/>
+            </ns1:r>
+            <ns1:r>
+              <ns1:rPr lang="ko-KR" altLang="en-US" dirty="0" smtClean="0">
+                <ns1:solidFill>
+                  <ns1:schemeClr val="tx1">
+                    <ns1:lumMod val="85000"/>
+                    <ns1:lumOff val="15000"/>
+                  </ns1:schemeClr>
+                </ns1:solidFill>
+                <ns1:latin typeface="Pretendard SemiBold" panose="02000703000000020004" pitchFamily="2" charset="-127"/>
+                <ns1:ea typeface="Pretendard SemiBold" panose="02000703000000020004" pitchFamily="2" charset="-127"/>
+                <ns1:cs typeface="Pretendard SemiBold" panose="02000703000000020004" pitchFamily="2" charset="-127"/>
+              </ns1:rPr>
+              <ns1:t/>
+            </ns1:r>
+            <ns1:endParaRPr lang="en-US" altLang="ko-KR" dirty="0" smtClean="0">
+              <ns1:solidFill>
+                <ns1:schemeClr val="tx1">
+                  <ns1:lumMod val="85000"/>
+                  <ns1:lumOff val="15000"/>
+                </ns1:schemeClr>
+              </ns1:solidFill>
+              <ns1:latin typeface="Pretendard SemiBold" panose="02000703000000020004" pitchFamily="2" charset="-127"/>
+              <ns1:ea typeface="Pretendard SemiBold" panose="02000703000000020004" pitchFamily="2" charset="-127"/>
+              <ns1:cs typeface="Pretendard SemiBold" panose="02000703000000020004" pitchFamily="2" charset="-127"/>
+            </ns1:endParaRPr>
+          </ns1:p>
+          <ns1:p>
+            <ns1:r>
+              <ns1:rPr lang="ko-KR" altLang="en-US" dirty="0" smtClean="0">
+                <ns1:solidFill>
+                  <ns1:schemeClr val="tx1">
+                    <ns1:lumMod val="85000"/>
+                    <ns1:lumOff val="15000"/>
+                  </ns1:schemeClr>
+                </ns1:solidFill>
+                <ns1:latin typeface="Pretendard SemiBold" panose="02000703000000020004" pitchFamily="2" charset="-127"/>
+                <ns1:ea typeface="Pretendard SemiBold" panose="02000703000000020004" pitchFamily="2" charset="-127"/>
+                <ns1:cs typeface="Pretendard SemiBold" panose="02000703000000020004" pitchFamily="2" charset="-127"/>
+              </ns1:rPr>
+              <ns1:t/>
+            </ns1:r>
+            <ns1:endParaRPr lang="en-US" altLang="ko-KR" dirty="0">
+              <ns1:solidFill>
+                <ns1:schemeClr val="tx1">
+                  <ns1:lumMod val="85000"/>
+                  <ns1:lumOff val="15000"/>
+                </ns1:schemeClr>
+              </ns1:solidFill>
+              <ns1:latin typeface="Pretendard SemiBold" panose="02000703000000020004" pitchFamily="2" charset="-127"/>
+              <ns1:ea typeface="Pretendard SemiBold" panose="02000703000000020004" pitchFamily="2" charset="-127"/>
+              <ns1:cs typeface="Pretendard SemiBold" panose="02000703000000020004" pitchFamily="2" charset="-127"/>
+            </ns1:endParaRPr>
+          </ns1:p>
+        </ns0:txBody>
+      </ns0:sp>
+      <ns0:sp>
+        <ns0:nvSpPr>
+          <ns0:cNvPr id="18" name="Text 1"/>
+          <ns0:cNvSpPr/>
+          <ns0:nvPr/>
+        </ns0:nvSpPr>
+        <ns0:spPr>
+          <ns1:xfrm>
+            <ns1:off x="395032" y="2311627"/>
+            <ns1:ext cx="2200409" cy="923063"/>
+          </ns1:xfrm>
+          <ns1:prstGeom prst="rect">
+            <ns1:avLst/>
+          </ns1:prstGeom>
+          <ns1:noFill/>
+          <ns1:ln/>
+        </ns0:spPr>
+        <ns0:txBody>
+          <ns1:bodyPr wrap="square" lIns="0" tIns="0" rIns="0" bIns="0" rtlCol="0" anchor="t"/>
+          <ns1:lstStyle/>
+          <ns1:p>
+            <ns1:r>
+              <ns1:rPr lang="ko-KR" altLang="en-US" sz="1200" dirty="0" smtClean="0">
+                <ns1:solidFill>
+                  <ns1:schemeClr val="tx1">
+                    <ns1:lumMod val="75000"/>
+                    <ns1:lumOff val="25000"/>
+                  </ns1:schemeClr>
+                </ns1:solidFill>
+                <ns1:latin typeface="Pretendard" panose="02000503000000020004" pitchFamily="2" charset="-127"/>
+                <ns1:ea typeface="Pretendard" panose="02000503000000020004" pitchFamily="2" charset="-127"/>
+                <ns1:cs typeface="Pretendard" panose="02000503000000020004" pitchFamily="2" charset="-127"/>
+              </ns1:rPr>
+              <ns1:t>고객 세일즈 사이클 전 단계에서 FDE가 기술 신뢰를 구축하고 딜 클로징을 가속하는 단계별 전략입니다.</ns1:t>
+            </ns1:r>
+            <ns1:endParaRPr lang="en-US" sz="1200" dirty="0">
+              <ns1:solidFill>
+                <ns1:schemeClr val="tx1">
+                  <ns1:lumMod val="75000"/>
+                  <ns1:lumOff val="25000"/>
+                </ns1:schemeClr>
+              </ns1:solidFill>
+              <ns1:latin typeface="Pretendard" panose="02000503000000020004" pitchFamily="2" charset="-127"/>
+              <ns1:ea typeface="Pretendard" panose="02000503000000020004" pitchFamily="2" charset="-127"/>
+              <ns1:cs typeface="Pretendard" panose="02000503000000020004" pitchFamily="2" charset="-127"/>
+            </ns1:endParaRPr>
+          </ns1:p>
+        </ns0:txBody>
+      </ns0:sp>
+      <ns0:sp>
+        <ns0:nvSpPr>
+          <ns0:cNvPr id="19" name="직사각형 18"/>
+          <ns0:cNvSpPr/>
+          <ns0:nvPr/>
+        </ns0:nvSpPr>
+        <ns0:spPr>
+          <ns1:xfrm>
+            <ns1:off x="2657592" y="780495"/>
+            <ns1:ext cx="9534407" cy="57705"/>
+          </ns1:xfrm>
+          <ns1:prstGeom prst="rect">
+            <ns1:avLst/>
+          </ns1:prstGeom>
+          <ns1:gradFill>
+            <ns1:gsLst>
+              <ns1:gs pos="0">
+                <ns1:srgbClr val="E6E7FF"/>
+              </ns1:gs>
+              <ns1:gs pos="77000">
+                <ns1:srgbClr val="1419AB"/>
+              </ns1:gs>
+            </ns1:gsLst>
+            <ns1:lin ang="2700000" scaled="0"/>
+          </ns1:gradFill>
+          <ns1:ln>
+            <ns1:noFill/>
+          </ns1:ln>
+        </ns0:spPr>
+        <ns0:style>
+          <ns1:lnRef idx="2">
+            <ns1:schemeClr val="accent1">
+              <ns1:shade val="50000"/>
+            </ns1:schemeClr>
+          </ns1:lnRef>
+          <ns1:fillRef idx="1">
+            <ns1:schemeClr val="accent1"/>
+          </ns1:fillRef>
+          <ns1:effectRef idx="0">
+            <ns1:schemeClr val="accent1"/>
+          </ns1:effectRef>
+          <ns1:fontRef idx="minor">
+            <ns1:schemeClr val="lt1"/>
+          </ns1:fontRef>
+        </ns0:style>
+        <ns0:txBody>
+          <ns1:bodyPr rtlCol="0" anchor="ctr"/>
+          <ns1:lstStyle/>
+          <ns1:p>
+            <ns1:pPr algn="ctr"/>
+            <ns1:endParaRPr lang="en-US" altLang="ko-KR" sz="1200" dirty="0">
+              <ns1:latin typeface="Pretendard SemiBold" panose="02000703000000020004" pitchFamily="2" charset="-127"/>
+              <ns1:ea typeface="Pretendard SemiBold" panose="02000703000000020004" pitchFamily="2" charset="-127"/>
+              <ns1:cs typeface="Pretendard SemiBold" panose="02000703000000020004" pitchFamily="2" charset="-127"/>
+            </ns1:endParaRPr>
+          </ns1:p>
+        </ns0:txBody>
+      </ns0:sp>
+      <ns0:sp>
+        <ns0:nvSpPr>
+          <ns0:cNvPr id="14" name="이등변 삼각형 13"/>
+          <ns0:cNvSpPr/>
+          <ns0:nvPr/>
+        </ns0:nvSpPr>
+        <ns0:spPr>
+          <ns1:xfrm rot="5400000">
+            <ns1:off x="4823242" y="3588121"/>
+            <ns1:ext cx="334964" cy="185573"/>
+          </ns1:xfrm>
+          <ns1:prstGeom prst="triangle">
+            <ns1:avLst>
+              <ns1:gd name="adj" fmla="val 49288"/>
+            </ns1:avLst>
+          </ns1:prstGeom>
+          <ns1:solidFill>
+            <ns1:srgbClr val="F2F2F2"/>
+          </ns1:solidFill>
+          <ns1:ln>
+            <ns1:noFill/>
+          </ns1:ln>
+        </ns0:spPr>
+        <ns0:style>
+          <ns1:lnRef idx="2">
+            <ns1:schemeClr val="accent1">
+              <ns1:shade val="50000"/>
+            </ns1:schemeClr>
+          </ns1:lnRef>
+          <ns1:fillRef idx="1">
+            <ns1:schemeClr val="accent1"/>
+          </ns1:fillRef>
+          <ns1:effectRef idx="0">
+            <ns1:schemeClr val="accent1"/>
+          </ns1:effectRef>
+          <ns1:fontRef idx="minor">
+            <ns1:schemeClr val="lt1"/>
+          </ns1:fontRef>
+        </ns0:style>
+        <ns0:txBody>
+          <ns1:bodyPr rtlCol="0" anchor="ctr"/>
+          <ns1:lstStyle/>
+          <ns1:p>
+            <ns1:pPr algn="ctr"/>
+            <ns1:endParaRPr lang="ko-KR" altLang="en-US"/>
+          </ns1:p>
+        </ns0:txBody>
+      </ns0:sp>
+      <ns0:sp>
+        <ns0:nvSpPr>
+          <ns0:cNvPr id="16" name="이등변 삼각형 15"/>
+          <ns0:cNvSpPr/>
+          <ns0:nvPr/>
+        </ns0:nvSpPr>
+        <ns0:spPr>
+          <ns1:xfrm rot="5400000">
+            <ns1:off x="7311312" y="3588121"/>
+            <ns1:ext cx="334964" cy="185573"/>
+          </ns1:xfrm>
+          <ns1:prstGeom prst="triangle">
+            <ns1:avLst>
+              <ns1:gd name="adj" fmla="val 49288"/>
+            </ns1:avLst>
+          </ns1:prstGeom>
+          <ns1:solidFill>
+            <ns1:srgbClr val="E2E2E2"/>
+          </ns1:solidFill>
+          <ns1:ln>
+            <ns1:noFill/>
+          </ns1:ln>
+        </ns0:spPr>
+        <ns0:style>
+          <ns1:lnRef idx="2">
+            <ns1:schemeClr val="accent1">
+              <ns1:shade val="50000"/>
+            </ns1:schemeClr>
+          </ns1:lnRef>
+          <ns1:fillRef idx="1">
+            <ns1:schemeClr val="accent1"/>
+          </ns1:fillRef>
+          <ns1:effectRef idx="0">
+            <ns1:schemeClr val="accent1"/>
+          </ns1:effectRef>
+          <ns1:fontRef idx="minor">
+            <ns1:schemeClr val="lt1"/>
+          </ns1:fontRef>
+        </ns0:style>
+        <ns0:txBody>
+          <ns1:bodyPr rtlCol="0" anchor="ctr"/>
+          <ns1:lstStyle/>
+          <ns1:p>
+            <ns1:pPr algn="ctr"/>
+            <ns1:endParaRPr lang="ko-KR" altLang="en-US"/>
+          </ns1:p>
+        </ns0:txBody>
+      </ns0:sp>
+      <ns0:sp>
+        <ns0:nvSpPr>
+          <ns0:cNvPr id="22" name="이등변 삼각형 21"/>
+          <ns0:cNvSpPr/>
+          <ns0:nvPr/>
+        </ns0:nvSpPr>
+        <ns0:spPr>
+          <ns1:xfrm rot="5400000">
+            <ns1:off x="9621521" y="3588121"/>
+            <ns1:ext cx="334964" cy="185573"/>
+          </ns1:xfrm>
+          <ns1:prstGeom prst="triangle">
+            <ns1:avLst>
+              <ns1:gd name="adj" fmla="val 49288"/>
+            </ns1:avLst>
+          </ns1:prstGeom>
+          <ns1:solidFill>
+            <ns1:srgbClr val="F2F2F2"/>
+          </ns1:solidFill>
+          <ns1:ln>
+            <ns1:noFill/>
+          </ns1:ln>
+        </ns0:spPr>
+        <ns0:style>
+          <ns1:lnRef idx="2">
+            <ns1:schemeClr val="accent1">
+              <ns1:shade val="50000"/>
+            </ns1:schemeClr>
+          </ns1:lnRef>
+          <ns1:fillRef idx="1">
+            <ns1:schemeClr val="accent1"/>
+          </ns1:fillRef>
+          <ns1:effectRef idx="0">
+            <ns1:schemeClr val="accent1"/>
+          </ns1:effectRef>
+          <ns1:fontRef idx="minor">
+            <ns1:schemeClr val="lt1"/>
+          </ns1:fontRef>
+        </ns0:style>
+        <ns0:txBody>
+          <ns1:bodyPr rtlCol="0" anchor="ctr"/>
+          <ns1:lstStyle/>
+          <ns1:p>
+            <ns1:pPr algn="ctr"/>
+            <ns1:endParaRPr lang="ko-KR" altLang="en-US"/>
+          </ns1:p>
+        </ns0:txBody>
+      </ns0:sp>
+      <ns0:sp>
+        <ns0:nvSpPr>
+          <ns0:cNvPr id="23" name="직사각형 22"/>
+          <ns0:cNvSpPr/>
+          <ns0:nvPr/>
+        </ns0:nvSpPr>
+        <ns0:spPr>
+          <ns1:xfrm>
+            <ns1:off x="4263276" y="895905"/>
+            <ns1:ext cx="634662" cy="338554"/>
+          </ns1:xfrm>
+          <ns1:prstGeom prst="rect">
+            <ns1:avLst/>
+          </ns1:prstGeom>
+        </ns0:spPr>
+        <ns0:txBody>
+          <ns1:bodyPr wrap="none">
+            <ns1:spAutoFit/>
+          </ns1:bodyPr>
+          <ns1:lstStyle/>
+          <ns1:p>
+            <ns1:pPr algn="r"/>
+            <ns1:r>
+              <ns1:rPr lang="ko-KR" altLang="ko-KR" sz="1600" dirty="0" smtClean="0">
+                <ns1:solidFill>
+                  <ns1:srgbClr val="B0B2E9"/>
+                </ns1:solidFill>
+                <ns1:latin typeface="Pretendard SemiBold" panose="02000703000000020004" pitchFamily="2" charset="-127"/>
+                <ns1:ea typeface="Pretendard SemiBold" panose="02000703000000020004" pitchFamily="2" charset="-127"/>
+                <ns1:cs typeface="Pretendard SemiBold" panose="02000703000000020004" pitchFamily="2" charset="-127"/>
+              </ns1:rPr>
+              <ns1:t>1단계</ns1:t>
+            </ns1:r>
+            <ns1:endParaRPr lang="en-US" altLang="ko-KR" sz="1600" dirty="0">
+              <ns1:solidFill>
+                <ns1:srgbClr val="B0B2E9"/>
+              </ns1:solidFill>
+              <ns1:latin typeface="Pretendard SemiBold" panose="02000703000000020004" pitchFamily="2" charset="-127"/>
+              <ns1:ea typeface="Pretendard SemiBold" panose="02000703000000020004" pitchFamily="2" charset="-127"/>
+              <ns1:cs typeface="Pretendard SemiBold" panose="02000703000000020004" pitchFamily="2" charset="-127"/>
+            </ns1:endParaRPr>
+          </ns1:p>
+        </ns0:txBody>
+      </ns0:sp>
+      <ns0:sp>
+        <ns0:nvSpPr>
+          <ns0:cNvPr id="24" name="직사각형 23"/>
+          <ns0:cNvSpPr/>
+          <ns0:nvPr/>
+        </ns0:nvSpPr>
+        <ns0:spPr>
+          <ns1:xfrm>
+            <ns1:off x="6751345" y="895905"/>
+            <ns1:ext cx="634662" cy="338554"/>
+          </ns1:xfrm>
+          <ns1:prstGeom prst="rect">
+            <ns1:avLst/>
+          </ns1:prstGeom>
+        </ns0:spPr>
+        <ns0:txBody>
+          <ns1:bodyPr wrap="none">
+            <ns1:spAutoFit/>
+          </ns1:bodyPr>
+          <ns1:lstStyle/>
+          <ns1:p>
+            <ns1:pPr algn="r"/>
+            <ns1:r>
+              <ns1:rPr lang="ko-KR" altLang="ko-KR" sz="1600" dirty="0" smtClean="0">
+                <ns1:solidFill>
+                  <ns1:srgbClr val="7377D1"/>
+                </ns1:solidFill>
+                <ns1:latin typeface="Pretendard SemiBold" panose="02000703000000020004" pitchFamily="2" charset="-127"/>
+                <ns1:ea typeface="Pretendard SemiBold" panose="02000703000000020004" pitchFamily="2" charset="-127"/>
+                <ns1:cs typeface="Pretendard SemiBold" panose="02000703000000020004" pitchFamily="2" charset="-127"/>
+              </ns1:rPr>
+              <ns1:t>2단계</ns1:t>
+            </ns1:r>
+            <ns1:endParaRPr lang="en-US" altLang="ko-KR" sz="1600" dirty="0">
+              <ns1:solidFill>
+                <ns1:srgbClr val="7377D1"/>
+              </ns1:solidFill>
+              <ns1:latin typeface="Pretendard SemiBold" panose="02000703000000020004" pitchFamily="2" charset="-127"/>
+              <ns1:ea typeface="Pretendard SemiBold" panose="02000703000000020004" pitchFamily="2" charset="-127"/>
+              <ns1:cs typeface="Pretendard SemiBold" panose="02000703000000020004" pitchFamily="2" charset="-127"/>
+            </ns1:endParaRPr>
+          </ns1:p>
+        </ns0:txBody>
+      </ns0:sp>
+      <ns0:sp>
+        <ns0:nvSpPr>
+          <ns0:cNvPr id="27" name="직사각형 26"/>
+          <ns0:cNvSpPr/>
+          <ns0:nvPr/>
+        </ns0:nvSpPr>
+        <ns0:spPr>
+          <ns1:xfrm>
+            <ns1:off x="9051374" y="895905"/>
+            <ns1:ext cx="634662" cy="338554"/>
+          </ns1:xfrm>
+          <ns1:prstGeom prst="rect">
+            <ns1:avLst/>
+          </ns1:prstGeom>
+        </ns0:spPr>
+        <ns0:txBody>
+          <ns1:bodyPr wrap="none">
+            <ns1:spAutoFit/>
+          </ns1:bodyPr>
+          <ns1:lstStyle/>
+          <ns1:p>
+            <ns1:pPr algn="r"/>
+            <ns1:r>
+              <ns1:rPr lang="ko-KR" altLang="ko-KR" sz="1600" dirty="0" smtClean="0">
+                <ns1:solidFill>
+                  <ns1:srgbClr val="363AB9"/>
+                </ns1:solidFill>
+                <ns1:latin typeface="Pretendard SemiBold" panose="02000703000000020004" pitchFamily="2" charset="-127"/>
+                <ns1:ea typeface="Pretendard SemiBold" panose="02000703000000020004" pitchFamily="2" charset="-127"/>
+                <ns1:cs typeface="Pretendard SemiBold" panose="02000703000000020004" pitchFamily="2" charset="-127"/>
+              </ns1:rPr>
+              <ns1:t>3단계</ns1:t>
+            </ns1:r>
+            <ns1:endParaRPr lang="en-US" altLang="ko-KR" sz="1600" dirty="0">
+              <ns1:solidFill>
+                <ns1:srgbClr val="363AB9"/>
+              </ns1:solidFill>
+              <ns1:latin typeface="Pretendard SemiBold" panose="02000703000000020004" pitchFamily="2" charset="-127"/>
+              <ns1:ea typeface="Pretendard SemiBold" panose="02000703000000020004" pitchFamily="2" charset="-127"/>
+              <ns1:cs typeface="Pretendard SemiBold" panose="02000703000000020004" pitchFamily="2" charset="-127"/>
+            </ns1:endParaRPr>
+          </ns1:p>
+        </ns0:txBody>
+      </ns0:sp>
+      <ns0:sp>
+        <ns0:nvSpPr>
+          <ns0:cNvPr id="28" name="직사각형 27"/>
+          <ns0:cNvSpPr/>
+          <ns0:nvPr/>
+        </ns0:nvSpPr>
+        <ns0:spPr>
+          <ns1:xfrm>
+            <ns1:off x="11493341" y="895905"/>
+            <ns1:ext cx="634662" cy="338554"/>
+          </ns1:xfrm>
+          <ns1:prstGeom prst="rect">
+            <ns1:avLst/>
+          </ns1:prstGeom>
+        </ns0:spPr>
+        <ns0:txBody>
+          <ns1:bodyPr wrap="none">
+            <ns1:spAutoFit/>
+          </ns1:bodyPr>
+          <ns1:lstStyle/>
+          <ns1:p>
+            <ns1:pPr algn="r"/>
+            <ns1:r>
+              <ns1:rPr lang="ko-KR" altLang="ko-KR" sz="1600" dirty="0" smtClean="0">
+                <ns1:solidFill>
+                  <ns1:srgbClr val="1419AB"/>
+                </ns1:solidFill>
+                <ns1:latin typeface="Pretendard SemiBold" panose="02000703000000020004" pitchFamily="2" charset="-127"/>
+                <ns1:ea typeface="Pretendard SemiBold" panose="02000703000000020004" pitchFamily="2" charset="-127"/>
+                <ns1:cs typeface="Pretendard SemiBold" panose="02000703000000020004" pitchFamily="2" charset="-127"/>
+              </ns1:rPr>
+              <ns1:t>4단계</ns1:t>
+            </ns1:r>
+            <ns1:endParaRPr lang="en-US" altLang="ko-KR" sz="1600" dirty="0">
+              <ns1:solidFill>
+                <ns1:srgbClr val="1419AB"/>
+              </ns1:solidFill>
+              <ns1:latin typeface="Pretendard SemiBold" panose="02000703000000020004" pitchFamily="2" charset="-127"/>
+              <ns1:ea typeface="Pretendard SemiBold" panose="02000703000000020004" pitchFamily="2" charset="-127"/>
+              <ns1:cs typeface="Pretendard SemiBold" panose="02000703000000020004" pitchFamily="2" charset="-127"/>
+            </ns1:endParaRPr>
+          </ns1:p>
+        </ns0:txBody>
+      </ns0:sp>
+      <ns0:sp>
+        <ns0:nvSpPr>
+          <ns0:cNvPr id="300" name="RQ300"/>
+          <ns0:cNvSpPr>
+            <ns1:spLocks noGrp="1"/>
+          </ns0:cNvSpPr>
+          <ns0:nvPr/>
+        </ns0:nvSpPr>
+        <ns0:spPr>
+          <ns1:xfrm>
+            <ns1:off x="2717592" y="4291015"/>
+            <ns1:ext cx="9414407" cy="6000"/>
+          </ns1:xfrm>
+          <ns1:prstGeom prst="rect">
+            <ns1:avLst/>
+          </ns1:prstGeom>
+          <ns1:solidFill>
+            <ns1:srgbClr val="CCCCCC"/>
+          </ns1:solidFill>
+        </ns0:spPr>
+      </ns0:sp>
+      <ns0:sp>
+        <ns0:nvSpPr>
+          <ns0:cNvPr id="301" name="RQ301"/>
+          <ns0:cNvSpPr>
+            <ns1:spLocks noGrp="1"/>
+          </ns0:cNvSpPr>
+          <ns0:nvPr/>
+        </ns0:nvSpPr>
+        <ns0:spPr>
+          <ns1:xfrm>
+            <ns1:off x="2717592" y="4327015"/>
+            <ns1:ext cx="9414407" cy="120000"/>
+          </ns1:xfrm>
+          <ns1:prstGeom prst="rect">
+            <ns1:avLst/>
+          </ns1:prstGeom>
+          <ns1:noFill/>
+        </ns0:spPr>
+        <ns0:txBody>
+          <ns1:bodyPr wrap="square" lIns="91440" tIns="45720" rIns="91440" bIns="45720" anchor="ctr">
+            <ns1:normAutofit/>
+          </ns1:bodyPr>
+          <ns1:lstStyle/>
+          <ns1:p>
+            <ns1:pPr algn="ctr"/>
+            <ns1:r>
+              <ns1:rPr lang="ko-KR" dirty="0" sz="1000">
+                <ns1:solidFill>
+                  <ns1:srgbClr val="999999"/>
+                </ns1:solidFill>
+                <ns1:latin typeface="Pretendard"/>
+                <ns1:ea typeface="Pretendard"/>
+                <ns1:cs typeface="Pretendard"/>
+              </ns1:rPr>
+              <ns1:t>분기별 실행 계획</ns1:t>
+            </ns1:r>
+          </ns1:p>
+        </ns0:txBody>
+      </ns0:sp>
+      <ns0:sp>
+        <ns0:nvSpPr>
+          <ns0:cNvPr id="302" name="RD302"/>
+          <ns0:cNvSpPr>
+            <ns1:spLocks noGrp="1"/>
+          </ns0:cNvSpPr>
+          <ns0:nvPr/>
+        </ns0:nvSpPr>
+        <ns0:spPr>
+          <ns1:xfrm>
+            <ns1:off x="2717592" y="1499874"/>
+            <ns1:ext cx="2120346" cy="4000000"/>
+          </ns1:xfrm>
+          <ns1:prstGeom prst="rect">
+            <ns1:avLst/>
+          </ns1:prstGeom>
+          <ns1:noFill/>
+        </ns0:spPr>
+        <ns0:txBody>
+          <ns1:bodyPr wrap="square" lIns="152400" tIns="114300" rIns="152400" bIns="114300" anchor="t"/>
+          <ns1:lstStyle/>
+          <ns1:p>
+            <ns1:r>
+              <ns1:rPr lang="ko-KR" dirty="0" sz="1100" b="1">
+                <ns1:solidFill>
+                  <ns1:srgbClr val="3C41E6"/>
+                </ns1:solidFill>
+                <ns1:latin typeface="Pretendard"/>
+                <ns1:ea typeface="Pretendard"/>
+                <ns1:cs typeface="Pretendard"/>
+              </ns1:rPr>
+              <ns1:t>▷ Q1</ns1:t>
+            </ns1:r>
+          </ns1:p>
+          <ns1:p>
+            <ns1:r>
+              <ns1:rPr lang="ko-KR" dirty="0" sz="500">
+                <ns1:latin typeface="Pretendard"/>
+                <ns1:ea typeface="Pretendard"/>
+                <ns1:cs typeface="Pretendard"/>
+              </ns1:rPr>
+              <ns1:t/>
+            </ns1:r>
+          </ns1:p>
+          <ns1:p>
+            <ns1:r>
+              <ns1:rPr lang="ko-KR" dirty="0" sz="1100">
+                <ns1:solidFill>
+                  <ns1:srgbClr val="444444"/>
+                </ns1:solidFill>
+                <ns1:latin typeface="Pretendard"/>
+                <ns1:ea typeface="Pretendard"/>
+                <ns1:cs typeface="Pretendard"/>
+              </ns1:rPr>
+              <ns1:t>기술 Discovery</ns1:t>
+            </ns1:r>
+          </ns1:p>
+          <ns1:p>
+            <ns1:r>
+              <ns1:rPr lang="ko-KR" dirty="0" sz="1100">
+                <ns1:solidFill>
+                  <ns1:srgbClr val="444444"/>
+                </ns1:solidFill>
+                <ns1:latin typeface="Pretendard"/>
+                <ns1:ea typeface="Pretendard"/>
+                <ns1:cs typeface="Pretendard"/>
+              </ns1:rPr>
+              <ns1:t>고객 Pain Point 파악</ns1:t>
+            </ns1:r>
+          </ns1:p>
+          <ns1:p>
+            <ns1:r>
+              <ns1:rPr lang="ko-KR" dirty="0" sz="1100">
+                <ns1:solidFill>
+                  <ns1:srgbClr val="444444"/>
+                </ns1:solidFill>
+                <ns1:latin typeface="Pretendard"/>
+                <ns1:ea typeface="Pretendard"/>
+                <ns1:cs typeface="Pretendard"/>
+              </ns1:rPr>
+              <ns1:t>요구사항 심층 인터뷰</ns1:t>
+            </ns1:r>
+          </ns1:p>
+        </ns0:txBody>
+      </ns0:sp>
+      <ns0:sp>
+        <ns0:nvSpPr>
+          <ns0:cNvPr id="303" name="RQ303"/>
+          <ns0:cNvSpPr>
+            <ns1:spLocks noGrp="1"/>
+          </ns0:cNvSpPr>
+          <ns0:nvPr/>
+        </ns0:nvSpPr>
+        <ns0:spPr>
+          <ns1:xfrm>
+            <ns1:off x="2717592" y="4738164"/>
+            <ns1:ext cx="2120346" cy="662940"/>
+          </ns1:xfrm>
+          <ns1:prstGeom prst="rect">
+            <ns1:avLst/>
+          </ns1:prstGeom>
+          <ns1:solidFill>
+            <ns1:srgbClr val="F4F6FE"/>
+          </ns1:solidFill>
+          <ns1:ln w="19050">
+            <ns1:solidFill>
+              <ns1:srgbClr val="3C41E6"/>
+            </ns1:solidFill>
+          </ns1:ln>
+        </ns0:spPr>
+        <ns0:txBody>
+          <ns1:bodyPr wrap="square" lIns="91440" tIns="45720" rIns="91440" bIns="45720" anchor="ctr">
+            <ns1:normAutofit/>
+          </ns1:bodyPr>
+          <ns1:lstStyle/>
+          <ns1:p>
+            <ns1:pPr algn="ctr"/>
+            <ns1:r>
+              <ns1:rPr lang="ko-KR" dirty="0" sz="900" b="1">
+                <ns1:solidFill>
+                  <ns1:srgbClr val="3C41E6"/>
+                </ns1:solidFill>
+                <ns1:latin typeface="Pretendard"/>
+                <ns1:ea typeface="Pretendard"/>
+                <ns1:cs typeface="Pretendard"/>
+              </ns1:rPr>
+              <ns1:t>핵심 목표</ns1:t>
+            </ns1:r>
+          </ns1:p>
+          <ns1:p>
+            <ns1:pPr algn="ctr"/>
+            <ns1:r>
+              <ns1:rPr lang="ko-KR" dirty="0" sz="1100">
+                <ns1:solidFill>
+                  <ns1:srgbClr val="111111"/>
+                </ns1:solidFill>
+                <ns1:latin typeface="Pretendard"/>
+                <ns1:ea typeface="Pretendard"/>
+                <ns1:cs typeface="Pretendard"/>
+              </ns1:rPr>
+              <ns1:t>요구사항 문서 완료</ns1:t>
+            </ns1:r>
+          </ns1:p>
+        </ns0:txBody>
+      </ns0:sp>
+      <ns0:sp>
+        <ns0:nvSpPr>
+          <ns0:cNvPr id="304" name="RQ304"/>
+          <ns0:cNvSpPr>
+            <ns1:spLocks noGrp="1"/>
+          </ns0:cNvSpPr>
+          <ns0:nvPr/>
+        </ns0:nvSpPr>
+        <ns0:spPr>
+          <ns1:xfrm>
+            <ns1:off x="2717592" y="5521104"/>
+            <ns1:ext cx="1378224" cy="662940"/>
+          </ns1:xfrm>
+          <ns1:prstGeom prst="rect">
+            <ns1:avLst/>
+          </ns1:prstGeom>
+          <ns1:solidFill>
+            <ns1:srgbClr val="E8ECFC"/>
+          </ns1:solidFill>
+        </ns0:spPr>
+        <ns0:txBody>
+          <ns1:bodyPr wrap="square" lIns="91440" tIns="45720" rIns="91440" bIns="45720" anchor="ctr">
+            <ns1:normAutofit/>
+          </ns1:bodyPr>
+          <ns1:lstStyle/>
+          <ns1:p>
+            <ns1:pPr algn="ctr"/>
+            <ns1:r>
+              <ns1:rPr lang="ko-KR" dirty="0" sz="900" b="1">
+                <ns1:solidFill>
+                  <ns1:srgbClr val="3C41E6"/>
+                </ns1:solidFill>
+                <ns1:latin typeface="Pretendard"/>
+                <ns1:ea typeface="Pretendard"/>
+                <ns1:cs typeface="Pretendard"/>
+              </ns1:rPr>
+              <ns1:t>리스크</ns1:t>
+            </ns1:r>
+          </ns1:p>
+          <ns1:p>
+            <ns1:pPr algn="ctr"/>
+            <ns1:r>
+              <ns1:rPr lang="ko-KR" dirty="0" sz="1100">
+                <ns1:solidFill>
+                  <ns1:srgbClr val="888888"/>
+                </ns1:solidFill>
+                <ns1:latin typeface="Pretendard"/>
+                <ns1:ea typeface="Pretendard"/>
+                <ns1:cs typeface="Pretendard"/>
+              </ns1:rPr>
+              <ns1:t>요건 불명확 → 범위 확장</ns1:t>
+            </ns1:r>
+          </ns1:p>
+        </ns0:txBody>
+      </ns0:sp>
+      <ns0:sp>
+        <ns0:nvSpPr>
+          <ns0:cNvPr id="305" name="RQ305"/>
+          <ns0:cNvSpPr>
+            <ns1:spLocks noGrp="1"/>
+          </ns0:cNvSpPr>
+          <ns0:nvPr/>
+        </ns0:nvSpPr>
+        <ns0:spPr>
+          <ns1:xfrm>
+            <ns1:off x="4135816" y="5521104"/>
+            <ns1:ext cx="702122" cy="662940"/>
+          </ns1:xfrm>
+          <ns1:prstGeom prst="rect">
+            <ns1:avLst/>
+          </ns1:prstGeom>
+          <ns1:solidFill>
+            <ns1:srgbClr val="E8ECFC"/>
+          </ns1:solidFill>
+        </ns0:spPr>
+        <ns0:txBody>
+          <ns1:bodyPr wrap="square" lIns="91440" tIns="45720" rIns="91440" bIns="45720" anchor="ctr">
+            <ns1:normAutofit/>
+          </ns1:bodyPr>
+          <ns1:lstStyle/>
+          <ns1:p>
+            <ns1:pPr algn="ctr"/>
+            <ns1:r>
+              <ns1:rPr lang="ko-KR" dirty="0" sz="900" b="1">
+                <ns1:solidFill>
+                  <ns1:srgbClr val="3C41E6"/>
+                </ns1:solidFill>
+                <ns1:latin typeface="Pretendard"/>
+                <ns1:ea typeface="Pretendard"/>
+                <ns1:cs typeface="Pretendard"/>
+              </ns1:rPr>
+              <ns1:t>규모</ns1:t>
+            </ns1:r>
+          </ns1:p>
+          <ns1:p>
+            <ns1:pPr algn="ctr"/>
+            <ns1:r>
+              <ns1:rPr lang="ko-KR" dirty="0" sz="1100">
+                <ns1:solidFill>
+                  <ns1:srgbClr val="333333"/>
+                </ns1:solidFill>
+                <ns1:latin typeface="Pretendard"/>
+                <ns1:ea typeface="Pretendard"/>
+                <ns1:cs typeface="Pretendard"/>
+              </ns1:rPr>
+              <ns1:t>FDE 1~2주</ns1:t>
+            </ns1:r>
+          </ns1:p>
+        </ns0:txBody>
+      </ns0:sp>
+      <ns0:sp>
+        <ns0:nvSpPr>
+          <ns0:cNvPr id="306" name="RD306"/>
+          <ns0:cNvSpPr>
+            <ns1:spLocks noGrp="1"/>
+          </ns0:cNvSpPr>
+          <ns0:nvPr/>
+        </ns0:nvSpPr>
+        <ns0:spPr>
+          <ns1:xfrm>
+            <ns1:off x="4957938" y="1499874"/>
+            <ns1:ext cx="2375782" cy="4000000"/>
+          </ns1:xfrm>
+          <ns1:prstGeom prst="rect">
+            <ns1:avLst/>
+          </ns1:prstGeom>
+          <ns1:noFill/>
+        </ns0:spPr>
+        <ns0:txBody>
+          <ns1:bodyPr wrap="square" lIns="152400" tIns="114300" rIns="152400" bIns="114300" anchor="t"/>
+          <ns1:lstStyle/>
+          <ns1:p>
+            <ns1:r>
+              <ns1:rPr lang="ko-KR" dirty="0" sz="1100" b="1">
+                <ns1:solidFill>
+                  <ns1:srgbClr val="2D30B8"/>
+                </ns1:solidFill>
+                <ns1:latin typeface="Pretendard"/>
+                <ns1:ea typeface="Pretendard"/>
+                <ns1:cs typeface="Pretendard"/>
+              </ns1:rPr>
+              <ns1:t>▷ Q2</ns1:t>
+            </ns1:r>
+          </ns1:p>
+          <ns1:p>
+            <ns1:r>
+              <ns1:rPr lang="ko-KR" dirty="0" sz="500">
+                <ns1:latin typeface="Pretendard"/>
+                <ns1:ea typeface="Pretendard"/>
+                <ns1:cs typeface="Pretendard"/>
+              </ns1:rPr>
+              <ns1:t/>
+            </ns1:r>
+          </ns1:p>
+          <ns1:p>
+            <ns1:r>
+              <ns1:rPr lang="ko-KR" dirty="0" sz="1100">
+                <ns1:solidFill>
+                  <ns1:srgbClr val="444444"/>
+                </ns1:solidFill>
+                <ns1:latin typeface="Pretendard"/>
+                <ns1:ea typeface="Pretendard"/>
+                <ns1:cs typeface="Pretendard"/>
+              </ns1:rPr>
+              <ns1:t>PoC 설계</ns1:t>
+            </ns1:r>
+          </ns1:p>
+          <ns1:p>
+            <ns1:r>
+              <ns1:rPr lang="ko-KR" dirty="0" sz="1100">
+                <ns1:solidFill>
+                  <ns1:srgbClr val="444444"/>
+                </ns1:solidFill>
+                <ns1:latin typeface="Pretendard"/>
+                <ns1:ea typeface="Pretendard"/>
+                <ns1:cs typeface="Pretendard"/>
+              </ns1:rPr>
+              <ns1:t>AWS AI 서비스 선정</ns1:t>
+            </ns1:r>
+          </ns1:p>
+          <ns1:p>
+            <ns1:r>
+              <ns1:rPr lang="ko-KR" dirty="0" sz="1100">
+                <ns1:solidFill>
+                  <ns1:srgbClr val="444444"/>
+                </ns1:solidFill>
+                <ns1:latin typeface="Pretendard"/>
+                <ns1:ea typeface="Pretendard"/>
+                <ns1:cs typeface="Pretendard"/>
+              </ns1:rPr>
+              <ns1:t>검증 시나리오 정의</ns1:t>
+            </ns1:r>
+          </ns1:p>
+        </ns0:txBody>
+      </ns0:sp>
+      <ns0:sp>
+        <ns0:nvSpPr>
+          <ns0:cNvPr id="307" name="RQ307"/>
+          <ns0:cNvSpPr>
+            <ns1:spLocks noGrp="1"/>
+          </ns0:cNvSpPr>
+          <ns0:nvPr/>
+        </ns0:nvSpPr>
+        <ns0:spPr>
+          <ns1:xfrm>
+            <ns1:off x="4957938" y="4738164"/>
+            <ns1:ext cx="2375782" cy="662940"/>
+          </ns1:xfrm>
+          <ns1:prstGeom prst="rect">
+            <ns1:avLst/>
+          </ns1:prstGeom>
+          <ns1:solidFill>
+            <ns1:srgbClr val="F4F6FE"/>
+          </ns1:solidFill>
+          <ns1:ln w="19050">
+            <ns1:solidFill>
+              <ns1:srgbClr val="2D30B8"/>
+            </ns1:solidFill>
+          </ns1:ln>
+        </ns0:spPr>
+        <ns0:txBody>
+          <ns1:bodyPr wrap="square" lIns="91440" tIns="45720" rIns="91440" bIns="45720" anchor="ctr">
+            <ns1:normAutofit/>
+          </ns1:bodyPr>
+          <ns1:lstStyle/>
+          <ns1:p>
+            <ns1:pPr algn="ctr"/>
+            <ns1:r>
+              <ns1:rPr lang="ko-KR" dirty="0" sz="900" b="1">
+                <ns1:solidFill>
+                  <ns1:srgbClr val="2D30B8"/>
+                </ns1:solidFill>
+                <ns1:latin typeface="Pretendard"/>
+                <ns1:ea typeface="Pretendard"/>
+                <ns1:cs typeface="Pretendard"/>
+              </ns1:rPr>
+              <ns1:t>핵심 목표</ns1:t>
+            </ns1:r>
+          </ns1:p>
+          <ns1:p>
+            <ns1:pPr algn="ctr"/>
+            <ns1:r>
+              <ns1:rPr lang="ko-KR" dirty="0" sz="1100">
+                <ns1:solidFill>
+                  <ns1:srgbClr val="111111"/>
+                </ns1:solidFill>
+                <ns1:latin typeface="Pretendard"/>
+                <ns1:ea typeface="Pretendard"/>
+                <ns1:cs typeface="Pretendard"/>
+              </ns1:rPr>
+              <ns1:t>PoC 완료율 100%</ns1:t>
+            </ns1:r>
+          </ns1:p>
+        </ns0:txBody>
+      </ns0:sp>
+      <ns0:sp>
+        <ns0:nvSpPr>
+          <ns0:cNvPr id="308" name="RQ308"/>
+          <ns0:cNvSpPr>
+            <ns1:spLocks noGrp="1"/>
+          </ns0:cNvSpPr>
+          <ns0:nvPr/>
+        </ns0:nvSpPr>
+        <ns0:spPr>
+          <ns1:xfrm>
+            <ns1:off x="4957938" y="5521104"/>
+            <ns1:ext cx="1544258" cy="662940"/>
+          </ns1:xfrm>
+          <ns1:prstGeom prst="rect">
+            <ns1:avLst/>
+          </ns1:prstGeom>
+          <ns1:solidFill>
+            <ns1:srgbClr val="D4DCFB"/>
+          </ns1:solidFill>
+        </ns0:spPr>
+        <ns0:txBody>
+          <ns1:bodyPr wrap="square" lIns="91440" tIns="45720" rIns="91440" bIns="45720" anchor="ctr">
+            <ns1:normAutofit/>
+          </ns1:bodyPr>
+          <ns1:lstStyle/>
+          <ns1:p>
+            <ns1:pPr algn="ctr"/>
+            <ns1:r>
+              <ns1:rPr lang="ko-KR" dirty="0" sz="900" b="1">
+                <ns1:solidFill>
+                  <ns1:srgbClr val="2D30B8"/>
+                </ns1:solidFill>
+                <ns1:latin typeface="Pretendard"/>
+                <ns1:ea typeface="Pretendard"/>
+                <ns1:cs typeface="Pretendard"/>
+              </ns1:rPr>
+              <ns1:t>리스크</ns1:t>
+            </ns1:r>
+          </ns1:p>
+          <ns1:p>
+            <ns1:pPr algn="ctr"/>
+            <ns1:r>
+              <ns1:rPr lang="ko-KR" dirty="0" sz="1100">
+                <ns1:solidFill>
+                  <ns1:srgbClr val="888888"/>
+                </ns1:solidFill>
+                <ns1:latin typeface="Pretendard"/>
+                <ns1:ea typeface="Pretendard"/>
+                <ns1:cs typeface="Pretendard"/>
+              </ns1:rPr>
+              <ns1:t>기술 적합성 미검증</ns1:t>
+            </ns1:r>
+          </ns1:p>
+        </ns0:txBody>
+      </ns0:sp>
+      <ns0:sp>
+        <ns0:nvSpPr>
+          <ns0:cNvPr id="309" name="RQ309"/>
+          <ns0:cNvSpPr>
+            <ns1:spLocks noGrp="1"/>
+          </ns0:cNvSpPr>
+          <ns0:nvPr/>
+        </ns0:nvSpPr>
+        <ns0:spPr>
+          <ns1:xfrm>
+            <ns1:off x="6542196" y="5521104"/>
+            <ns1:ext cx="791524" cy="662940"/>
+          </ns1:xfrm>
+          <ns1:prstGeom prst="rect">
+            <ns1:avLst/>
+          </ns1:prstGeom>
+          <ns1:solidFill>
+            <ns1:srgbClr val="D4DCFB"/>
+          </ns1:solidFill>
+        </ns0:spPr>
+        <ns0:txBody>
+          <ns1:bodyPr wrap="square" lIns="91440" tIns="45720" rIns="91440" bIns="45720" anchor="ctr">
+            <ns1:normAutofit/>
+          </ns1:bodyPr>
+          <ns1:lstStyle/>
+          <ns1:p>
+            <ns1:pPr algn="ctr"/>
+            <ns1:r>
+              <ns1:rPr lang="ko-KR" dirty="0" sz="900" b="1">
+                <ns1:solidFill>
+                  <ns1:srgbClr val="2D30B8"/>
+                </ns1:solidFill>
+                <ns1:latin typeface="Pretendard"/>
+                <ns1:ea typeface="Pretendard"/>
+                <ns1:cs typeface="Pretendard"/>
+              </ns1:rPr>
+              <ns1:t>규모</ns1:t>
+            </ns1:r>
+          </ns1:p>
+          <ns1:p>
+            <ns1:pPr algn="ctr"/>
+            <ns1:r>
+              <ns1:rPr lang="ko-KR" dirty="0" sz="1100">
+                <ns1:solidFill>
+                  <ns1:srgbClr val="333333"/>
+                </ns1:solidFill>
+                <ns1:latin typeface="Pretendard"/>
+                <ns1:ea typeface="Pretendard"/>
+                <ns1:cs typeface="Pretendard"/>
+              </ns1:rPr>
+              <ns1:t>FDE 2~4주</ns1:t>
+            </ns1:r>
+          </ns1:p>
+        </ns0:txBody>
+      </ns0:sp>
+      <ns0:sp>
+        <ns0:nvSpPr>
+          <ns0:cNvPr id="310" name="RD310"/>
+          <ns0:cNvSpPr>
+            <ns1:spLocks noGrp="1"/>
+          </ns0:cNvSpPr>
+          <ns0:nvPr/>
+        </ns0:nvSpPr>
+        <ns0:spPr>
+          <ns1:xfrm>
+            <ns1:off x="7453720" y="1499874"/>
+            <ns1:ext cx="2182497" cy="4000000"/>
+          </ns1:xfrm>
+          <ns1:prstGeom prst="rect">
+            <ns1:avLst/>
+          </ns1:prstGeom>
+          <ns1:noFill/>
+        </ns0:spPr>
+        <ns0:txBody>
+          <ns1:bodyPr wrap="square" lIns="152400" tIns="114300" rIns="152400" bIns="114300" anchor="t"/>
+          <ns1:lstStyle/>
+          <ns1:p>
+            <ns1:r>
+              <ns1:rPr lang="ko-KR" dirty="0" sz="1100" b="1">
+                <ns1:solidFill>
+                  <ns1:srgbClr val="1E2490"/>
+                </ns1:solidFill>
+                <ns1:latin typeface="Pretendard"/>
+                <ns1:ea typeface="Pretendard"/>
+                <ns1:cs typeface="Pretendard"/>
+              </ns1:rPr>
+              <ns1:t>▷ Q3</ns1:t>
+            </ns1:r>
+          </ns1:p>
+          <ns1:p>
+            <ns1:r>
+              <ns1:rPr lang="ko-KR" dirty="0" sz="500">
+                <ns1:latin typeface="Pretendard"/>
+                <ns1:ea typeface="Pretendard"/>
+                <ns1:cs typeface="Pretendard"/>
+              </ns1:rPr>
+              <ns1:t/>
+            </ns1:r>
+          </ns1:p>
+          <ns1:p>
+            <ns1:r>
+              <ns1:rPr lang="ko-KR" dirty="0" sz="1100">
+                <ns1:solidFill>
+                  <ns1:srgbClr val="444444"/>
+                </ns1:solidFill>
+                <ns1:latin typeface="Pretendard"/>
+                <ns1:ea typeface="Pretendard"/>
+                <ns1:cs typeface="Pretendard"/>
+              </ns1:rPr>
+              <ns1:t>아키텍처 제안</ns1:t>
+            </ns1:r>
+          </ns1:p>
+          <ns1:p>
+            <ns1:r>
+              <ns1:rPr lang="ko-KR" dirty="0" sz="1100">
+                <ns1:solidFill>
+                  <ns1:srgbClr val="444444"/>
+                </ns1:solidFill>
+                <ns1:latin typeface="Pretendard"/>
+                <ns1:ea typeface="Pretendard"/>
+                <ns1:cs typeface="Pretendard"/>
+              </ns1:rPr>
+              <ns1:t>비용·성능·보안 최적화</ns1:t>
+            </ns1:r>
+          </ns1:p>
+          <ns1:p>
+            <ns1:r>
+              <ns1:rPr lang="ko-KR" dirty="0" sz="1100">
+                <ns1:solidFill>
+                  <ns1:srgbClr val="444444"/>
+                </ns1:solidFill>
+                <ns1:latin typeface="Pretendard"/>
+                <ns1:ea typeface="Pretendard"/>
+                <ns1:cs typeface="Pretendard"/>
+              </ns1:rPr>
+              <ns1:t>레퍼런스 아키텍처 작성</ns1:t>
+            </ns1:r>
+          </ns1:p>
+        </ns0:txBody>
+      </ns0:sp>
+      <ns0:sp>
+        <ns0:nvSpPr>
+          <ns0:cNvPr id="311" name="RQ311"/>
+          <ns0:cNvSpPr>
+            <ns1:spLocks noGrp="1"/>
+          </ns0:cNvSpPr>
+          <ns0:nvPr/>
+        </ns0:nvSpPr>
+        <ns0:spPr>
+          <ns1:xfrm>
+            <ns1:off x="7453720" y="4738164"/>
+            <ns1:ext cx="2182497" cy="662940"/>
+          </ns1:xfrm>
+          <ns1:prstGeom prst="rect">
+            <ns1:avLst/>
+          </ns1:prstGeom>
+          <ns1:solidFill>
+            <ns1:srgbClr val="F4F6FE"/>
+          </ns1:solidFill>
+          <ns1:ln w="19050">
+            <ns1:solidFill>
+              <ns1:srgbClr val="1E2490"/>
+            </ns1:solidFill>
+          </ns1:ln>
+        </ns0:spPr>
+        <ns0:txBody>
+          <ns1:bodyPr wrap="square" lIns="91440" tIns="45720" rIns="91440" bIns="45720" anchor="ctr">
+            <ns1:normAutofit/>
+          </ns1:bodyPr>
+          <ns1:lstStyle/>
+          <ns1:p>
+            <ns1:pPr algn="ctr"/>
+            <ns1:r>
+              <ns1:rPr lang="ko-KR" dirty="0" sz="900" b="1">
+                <ns1:solidFill>
+                  <ns1:srgbClr val="1E2490"/>
+                </ns1:solidFill>
+                <ns1:latin typeface="Pretendard"/>
+                <ns1:ea typeface="Pretendard"/>
+                <ns1:cs typeface="Pretendard"/>
+              </ns1:rPr>
+              <ns1:t>핵심 목표</ns1:t>
+            </ns1:r>
+          </ns1:p>
+          <ns1:p>
+            <ns1:pPr algn="ctr"/>
+            <ns1:r>
+              <ns1:rPr lang="ko-KR" dirty="0" sz="1100">
+                <ns1:solidFill>
+                  <ns1:srgbClr val="111111"/>
+                </ns1:solidFill>
+                <ns1:latin typeface="Pretendard"/>
+                <ns1:ea typeface="Pretendard"/>
+                <ns1:cs typeface="Pretendard"/>
+              </ns1:rPr>
+              <ns1:t>WAR 통과 / 제안서 승인</ns1:t>
+            </ns1:r>
+          </ns1:p>
+        </ns0:txBody>
+      </ns0:sp>
+      <ns0:sp>
+        <ns0:nvSpPr>
+          <ns0:cNvPr id="312" name="RQ312"/>
+          <ns0:cNvSpPr>
+            <ns1:spLocks noGrp="1"/>
+          </ns0:cNvSpPr>
+          <ns0:nvPr/>
+        </ns0:nvSpPr>
+        <ns0:spPr>
+          <ns1:xfrm>
+            <ns1:off x="7453720" y="5521104"/>
+            <ns1:ext cx="1418623" cy="662940"/>
+          </ns1:xfrm>
+          <ns1:prstGeom prst="rect">
+            <ns1:avLst/>
+          </ns1:prstGeom>
+          <ns1:solidFill>
+            <ns1:srgbClr val="C0CCFA"/>
+          </ns1:solidFill>
+        </ns0:spPr>
+        <ns0:txBody>
+          <ns1:bodyPr wrap="square" lIns="91440" tIns="45720" rIns="91440" bIns="45720" anchor="ctr">
+            <ns1:normAutofit/>
+          </ns1:bodyPr>
+          <ns1:lstStyle/>
+          <ns1:p>
+            <ns1:pPr algn="ctr"/>
+            <ns1:r>
+              <ns1:rPr lang="ko-KR" dirty="0" sz="900" b="1">
+                <ns1:solidFill>
+                  <ns1:srgbClr val="1E2490"/>
+                </ns1:solidFill>
+                <ns1:latin typeface="Pretendard"/>
+                <ns1:ea typeface="Pretendard"/>
+                <ns1:cs typeface="Pretendard"/>
+              </ns1:rPr>
+              <ns1:t>리스크</ns1:t>
+            </ns1:r>
+          </ns1:p>
+          <ns1:p>
+            <ns1:pPr algn="ctr"/>
+            <ns1:r>
+              <ns1:rPr lang="ko-KR" dirty="0" sz="1100">
+                <ns1:solidFill>
+                  <ns1:srgbClr val="888888"/>
+                </ns1:solidFill>
+                <ns1:latin typeface="Pretendard"/>
+                <ns1:ea typeface="Pretendard"/>
+                <ns1:cs typeface="Pretendard"/>
+              </ns1:rPr>
+              <ns1:t>예산 불일치 → 재설계</ns1:t>
+            </ns1:r>
+          </ns1:p>
+        </ns0:txBody>
+      </ns0:sp>
+      <ns0:sp>
+        <ns0:nvSpPr>
+          <ns0:cNvPr id="313" name="RQ313"/>
+          <ns0:cNvSpPr>
+            <ns1:spLocks noGrp="1"/>
+          </ns0:cNvSpPr>
+          <ns0:nvPr/>
+        </ns0:nvSpPr>
+        <ns0:spPr>
+          <ns1:xfrm>
+            <ns1:off x="8912343" y="5521104"/>
+            <ns1:ext cx="723874" cy="662940"/>
+          </ns1:xfrm>
+          <ns1:prstGeom prst="rect">
+            <ns1:avLst/>
+          </ns1:prstGeom>
+          <ns1:solidFill>
+            <ns1:srgbClr val="C0CCFA"/>
+          </ns1:solidFill>
+        </ns0:spPr>
+        <ns0:txBody>
+          <ns1:bodyPr wrap="square" lIns="91440" tIns="45720" rIns="91440" bIns="45720" anchor="ctr">
+            <ns1:normAutofit/>
+          </ns1:bodyPr>
+          <ns1:lstStyle/>
+          <ns1:p>
+            <ns1:pPr algn="ctr"/>
+            <ns1:r>
+              <ns1:rPr lang="ko-KR" dirty="0" sz="900" b="1">
+                <ns1:solidFill>
+                  <ns1:srgbClr val="1E2490"/>
+                </ns1:solidFill>
+                <ns1:latin typeface="Pretendard"/>
+                <ns1:ea typeface="Pretendard"/>
+                <ns1:cs typeface="Pretendard"/>
+              </ns1:rPr>
+              <ns1:t>규모</ns1:t>
+            </ns1:r>
+          </ns1:p>
+          <ns1:p>
+            <ns1:pPr algn="ctr"/>
+            <ns1:r>
+              <ns1:rPr lang="ko-KR" dirty="0" sz="1100">
+                <ns1:solidFill>
+                  <ns1:srgbClr val="333333"/>
+                </ns1:solidFill>
+                <ns1:latin typeface="Pretendard"/>
+                <ns1:ea typeface="Pretendard"/>
+                <ns1:cs typeface="Pretendard"/>
+              </ns1:rPr>
+              <ns1:t>FDE 1~2주</ns1:t>
+            </ns1:r>
+          </ns1:p>
+        </ns0:txBody>
+      </ns0:sp>
+      <ns0:sp>
+        <ns0:nvSpPr>
+          <ns0:cNvPr id="314" name="RD314"/>
+          <ns0:cNvSpPr>
+            <ns1:spLocks noGrp="1"/>
+          </ns0:cNvSpPr>
+          <ns0:nvPr/>
+        </ns0:nvSpPr>
+        <ns0:spPr>
+          <ns1:xfrm>
+            <ns1:off x="9756217" y="1499874"/>
+            <ns1:ext cx="2375782" cy="4000000"/>
+          </ns1:xfrm>
+          <ns1:prstGeom prst="rect">
+            <ns1:avLst/>
+          </ns1:prstGeom>
+          <ns1:noFill/>
+        </ns0:spPr>
+        <ns0:txBody>
+          <ns1:bodyPr wrap="square" lIns="152400" tIns="114300" rIns="152400" bIns="114300" anchor="t"/>
+          <ns1:lstStyle/>
+          <ns1:p>
+            <ns1:r>
+              <ns1:rPr lang="ko-KR" dirty="0" sz="1100" b="1">
+                <ns1:solidFill>
+                  <ns1:srgbClr val="1419AB"/>
+                </ns1:solidFill>
+                <ns1:latin typeface="Pretendard"/>
+                <ns1:ea typeface="Pretendard"/>
+                <ns1:cs typeface="Pretendard"/>
+              </ns1:rPr>
+              <ns1:t>▷ Q4</ns1:t>
+            </ns1:r>
+          </ns1:p>
+          <ns1:p>
+            <ns1:r>
+              <ns1:rPr lang="ko-KR" dirty="0" sz="500">
+                <ns1:latin typeface="Pretendard"/>
+                <ns1:ea typeface="Pretendard"/>
+                <ns1:cs typeface="Pretendard"/>
+              </ns1:rPr>
+              <ns1:t/>
+            </ns1:r>
+          </ns1:p>
+          <ns1:p>
+            <ns1:r>
+              <ns1:rPr lang="ko-KR" dirty="0" sz="1100">
+                <ns1:solidFill>
+                  <ns1:srgbClr val="444444"/>
+                </ns1:solidFill>
+                <ns1:latin typeface="Pretendard"/>
+                <ns1:ea typeface="Pretendard"/>
+                <ns1:cs typeface="Pretendard"/>
+              </ns1:rPr>
+              <ns1:t>딜 클로징 지원</ns1:t>
+            </ns1:r>
+          </ns1:p>
+          <ns1:p>
+            <ns1:r>
+              <ns1:rPr lang="ko-KR" dirty="0" sz="1100">
+                <ns1:solidFill>
+                  <ns1:srgbClr val="444444"/>
+                </ns1:solidFill>
+                <ns1:latin typeface="Pretendard"/>
+                <ns1:ea typeface="Pretendard"/>
+                <ns1:cs typeface="Pretendard"/>
+              </ns1:rPr>
+              <ns1:t>ROI 문서화</ns1:t>
+            </ns1:r>
+          </ns1:p>
+          <ns1:p>
+            <ns1:r>
+              <ns1:rPr lang="ko-KR" dirty="0" sz="1100">
+                <ns1:solidFill>
+                  <ns1:srgbClr val="444444"/>
+                </ns1:solidFill>
+                <ns1:latin typeface="Pretendard"/>
+                <ns1:ea typeface="Pretendard"/>
+                <ns1:cs typeface="Pretendard"/>
+              </ns1:rPr>
+              <ns1:t>경영진 프레젠테이션</ns1:t>
+            </ns1:r>
+          </ns1:p>
+        </ns0:txBody>
+      </ns0:sp>
+      <ns0:sp>
+        <ns0:nvSpPr>
+          <ns0:cNvPr id="315" name="RQ315"/>
+          <ns0:cNvSpPr>
+            <ns1:spLocks noGrp="1"/>
+          </ns0:cNvSpPr>
+          <ns0:nvPr/>
+        </ns0:nvSpPr>
+        <ns0:spPr>
+          <ns1:xfrm>
+            <ns1:off x="9756217" y="4738164"/>
+            <ns1:ext cx="2375782" cy="662940"/>
+          </ns1:xfrm>
+          <ns1:prstGeom prst="rect">
+            <ns1:avLst/>
+          </ns1:prstGeom>
+          <ns1:solidFill>
+            <ns1:srgbClr val="F4F6FE"/>
+          </ns1:solidFill>
+          <ns1:ln w="19050">
+            <ns1:solidFill>
+              <ns1:srgbClr val="1419AB"/>
+            </ns1:solidFill>
+          </ns1:ln>
+        </ns0:spPr>
+        <ns0:txBody>
+          <ns1:bodyPr wrap="square" lIns="91440" tIns="45720" rIns="91440" bIns="45720" anchor="ctr">
+            <ns1:normAutofit/>
+          </ns1:bodyPr>
+          <ns1:lstStyle/>
+          <ns1:p>
+            <ns1:pPr algn="ctr"/>
+            <ns1:r>
+              <ns1:rPr lang="ko-KR" dirty="0" sz="900" b="1">
+                <ns1:solidFill>
+                  <ns1:srgbClr val="1419AB"/>
+                </ns1:solidFill>
+                <ns1:latin typeface="Pretendard"/>
+                <ns1:ea typeface="Pretendard"/>
+                <ns1:cs typeface="Pretendard"/>
+              </ns1:rPr>
+              <ns1:t>핵심 목표</ns1:t>
+            </ns1:r>
+          </ns1:p>
+          <ns1:p>
+            <ns1:pPr algn="ctr"/>
+            <ns1:r>
+              <ns1:rPr lang="ko-KR" dirty="0" sz="1100">
+                <ns1:solidFill>
+                  <ns1:srgbClr val="111111"/>
+                </ns1:solidFill>
+                <ns1:latin typeface="Pretendard"/>
+                <ns1:ea typeface="Pretendard"/>
+                <ns1:cs typeface="Pretendard"/>
+              </ns1:rPr>
+              <ns1:t>계약 전환율 향상</ns1:t>
+            </ns1:r>
+          </ns1:p>
+        </ns0:txBody>
+      </ns0:sp>
+      <ns0:sp>
+        <ns0:nvSpPr>
+          <ns0:cNvPr id="316" name="RQ316"/>
+          <ns0:cNvSpPr>
+            <ns1:spLocks noGrp="1"/>
+          </ns0:cNvSpPr>
+          <ns0:nvPr/>
+        </ns0:nvSpPr>
+        <ns0:spPr>
+          <ns1:xfrm>
+            <ns1:off x="9756217" y="5521104"/>
+            <ns1:ext cx="1544258" cy="662940"/>
+          </ns1:xfrm>
+          <ns1:prstGeom prst="rect">
+            <ns1:avLst/>
+          </ns1:prstGeom>
+          <ns1:solidFill>
+            <ns1:srgbClr val="AABBF9"/>
+          </ns1:solidFill>
+        </ns0:spPr>
+        <ns0:txBody>
+          <ns1:bodyPr wrap="square" lIns="91440" tIns="45720" rIns="91440" bIns="45720" anchor="ctr">
+            <ns1:normAutofit/>
+          </ns1:bodyPr>
+          <ns1:lstStyle/>
+          <ns1:p>
+            <ns1:pPr algn="ctr"/>
+            <ns1:r>
+              <ns1:rPr lang="ko-KR" dirty="0" sz="900" b="1">
+                <ns1:solidFill>
+                  <ns1:srgbClr val="1419AB"/>
+                </ns1:solidFill>
+                <ns1:latin typeface="Pretendard"/>
+                <ns1:ea typeface="Pretendard"/>
+                <ns1:cs typeface="Pretendard"/>
+              </ns1:rPr>
+              <ns1:t>리스크</ns1:t>
+            </ns1:r>
+          </ns1:p>
+          <ns1:p>
+            <ns1:pPr algn="ctr"/>
+            <ns1:r>
+              <ns1:rPr lang="ko-KR" dirty="0" sz="1100">
+                <ns1:solidFill>
+                  <ns1:srgbClr val="888888"/>
+                </ns1:solidFill>
+                <ns1:latin typeface="Pretendard"/>
+                <ns1:ea typeface="Pretendard"/>
+                <ns1:cs typeface="Pretendard"/>
+              </ns1:rPr>
+              <ns1:t>경영진 기술 이해 부족</ns1:t>
+            </ns1:r>
+          </ns1:p>
+        </ns0:txBody>
+      </ns0:sp>
+      <ns0:sp>
+        <ns0:nvSpPr>
+          <ns0:cNvPr id="317" name="RQ317"/>
+          <ns0:cNvSpPr>
+            <ns1:spLocks noGrp="1"/>
+          </ns0:cNvSpPr>
+          <ns0:nvPr/>
+        </ns0:nvSpPr>
+        <ns0:spPr>
+          <ns1:xfrm>
+            <ns1:off x="11340475" y="5521104"/>
+            <ns1:ext cx="791524" cy="662940"/>
+          </ns1:xfrm>
+          <ns1:prstGeom prst="rect">
+            <ns1:avLst/>
+          </ns1:prstGeom>
+          <ns1:solidFill>
+            <ns1:srgbClr val="AABBF9"/>
+          </ns1:solidFill>
+        </ns0:spPr>
+        <ns0:txBody>
+          <ns1:bodyPr wrap="square" lIns="91440" tIns="45720" rIns="91440" bIns="45720" anchor="ctr">
+            <ns1:normAutofit/>
+          </ns1:bodyPr>
+          <ns1:lstStyle/>
+          <ns1:p>
+            <ns1:pPr algn="ctr"/>
+            <ns1:r>
+              <ns1:rPr lang="ko-KR" dirty="0" sz="900" b="1">
+                <ns1:solidFill>
+                  <ns1:srgbClr val="1419AB"/>
+                </ns1:solidFill>
+                <ns1:latin typeface="Pretendard"/>
+                <ns1:ea typeface="Pretendard"/>
+                <ns1:cs typeface="Pretendard"/>
+              </ns1:rPr>
+              <ns1:t>규모</ns1:t>
+            </ns1:r>
+          </ns1:p>
+          <ns1:p>
+            <ns1:pPr algn="ctr"/>
+            <ns1:r>
+              <ns1:rPr lang="ko-KR" dirty="0" sz="1100">
+                <ns1:solidFill>
+                  <ns1:srgbClr val="333333"/>
+                </ns1:solidFill>
+                <ns1:latin typeface="Pretendard"/>
+                <ns1:ea typeface="Pretendard"/>
+                <ns1:cs typeface="Pretendard"/>
+              </ns1:rPr>
+              <ns1:t>FDE 1주</ns1:t>
+            </ns1:r>
+          </ns1:p>
+        </ns0:txBody>
+      </ns0:sp>
+    </ns0:spTree>
+    <ns0:extLst>
+      <ns0:ext uri="{BB962C8B-B14F-4D97-AF65-F5344CB8AC3E}">
+        <ns2:creationId val="3958239633"/>
+      </ns0:ext>
+    </ns0:extLst>
+  </ns0:cSld>
+  <ns0:clrMapOvr>
+    <ns1:masterClrMapping/>
+  </ns0:clrMapOvr>
+</ns0:sld>
 </file>
 
 <file path=ppt/slides/slide38.xml><?xml version="1.0" encoding="utf-8"?>
